--- a/0603_Good/ppt/DCSP_0603.pptx
+++ b/0603_Good/ppt/DCSP_0603.pptx
@@ -6,16 +6,17 @@
     <p:sldMasterId id="2147483672" r:id="rId5"/>
   </p:sldMasterIdLst>
   <p:notesMasterIdLst>
-    <p:notesMasterId r:id="rId13"/>
+    <p:notesMasterId r:id="rId14"/>
   </p:notesMasterIdLst>
   <p:sldIdLst>
     <p:sldId id="336" r:id="rId6"/>
     <p:sldId id="258" r:id="rId7"/>
     <p:sldId id="362" r:id="rId8"/>
     <p:sldId id="372" r:id="rId9"/>
-    <p:sldId id="373" r:id="rId10"/>
-    <p:sldId id="374" r:id="rId11"/>
+    <p:sldId id="374" r:id="rId10"/>
+    <p:sldId id="375" r:id="rId11"/>
     <p:sldId id="371" r:id="rId12"/>
+    <p:sldId id="376" r:id="rId13"/>
   </p:sldIdLst>
   <p:sldSz cx="9144000" cy="6858000" type="screen4x3"/>
   <p:notesSz cx="6858000" cy="9144000"/>
@@ -808,7 +809,7 @@
         <p:cNvPr id="1" name="">
           <a:extLst>
             <a:ext uri="{FF2B5EF4-FFF2-40B4-BE49-F238E27FC236}">
-              <a16:creationId xmlns:a16="http://schemas.microsoft.com/office/drawing/2014/main" id="{6CBDA33F-B5C3-9894-692C-B78BC3B992A2}"/>
+              <a16:creationId xmlns:a16="http://schemas.microsoft.com/office/drawing/2014/main" id="{3F3B5F9C-2324-5ABA-675D-82C45CEAB243}"/>
             </a:ext>
           </a:extLst>
         </p:cNvPr>
@@ -828,7 +829,7 @@
           <p:cNvPr id="2" name="슬라이드 이미지 개체 틀 1">
             <a:extLst>
               <a:ext uri="{FF2B5EF4-FFF2-40B4-BE49-F238E27FC236}">
-                <a16:creationId xmlns:a16="http://schemas.microsoft.com/office/drawing/2014/main" id="{E8B010D0-4969-C31E-5478-B45CFAB3E840}"/>
+                <a16:creationId xmlns:a16="http://schemas.microsoft.com/office/drawing/2014/main" id="{B1766512-6D1E-5637-7FB6-145B2BC2F76E}"/>
               </a:ext>
             </a:extLst>
           </p:cNvPr>
@@ -846,7 +847,7 @@
           <p:cNvPr id="3" name="슬라이드 노트 개체 틀 2">
             <a:extLst>
               <a:ext uri="{FF2B5EF4-FFF2-40B4-BE49-F238E27FC236}">
-                <a16:creationId xmlns:a16="http://schemas.microsoft.com/office/drawing/2014/main" id="{EC44FB05-2586-8C56-2831-776EF8C5C891}"/>
+                <a16:creationId xmlns:a16="http://schemas.microsoft.com/office/drawing/2014/main" id="{90282F23-1481-2EB5-07C4-F32AE9B8E0E3}"/>
               </a:ext>
             </a:extLst>
           </p:cNvPr>
@@ -884,7 +885,7 @@
           <p:cNvPr id="4" name="슬라이드 번호 개체 틀 3">
             <a:extLst>
               <a:ext uri="{FF2B5EF4-FFF2-40B4-BE49-F238E27FC236}">
-                <a16:creationId xmlns:a16="http://schemas.microsoft.com/office/drawing/2014/main" id="{D683604B-D9C3-33B0-8779-B01E4A64A187}"/>
+                <a16:creationId xmlns:a16="http://schemas.microsoft.com/office/drawing/2014/main" id="{3BB7820B-2738-EB31-1F5A-31599CF83BC4}"/>
               </a:ext>
             </a:extLst>
           </p:cNvPr>
@@ -911,7 +912,7 @@
     </p:spTree>
     <p:extLst>
       <p:ext uri="{BB962C8B-B14F-4D97-AF65-F5344CB8AC3E}">
-        <p14:creationId xmlns:p14="http://schemas.microsoft.com/office/powerpoint/2010/main" val="3897913046"/>
+        <p14:creationId xmlns:p14="http://schemas.microsoft.com/office/powerpoint/2010/main" val="3735902976"/>
       </p:ext>
     </p:extLst>
   </p:cSld>
@@ -929,7 +930,7 @@
         <p:cNvPr id="1" name="">
           <a:extLst>
             <a:ext uri="{FF2B5EF4-FFF2-40B4-BE49-F238E27FC236}">
-              <a16:creationId xmlns:a16="http://schemas.microsoft.com/office/drawing/2014/main" id="{3F3B5F9C-2324-5ABA-675D-82C45CEAB243}"/>
+              <a16:creationId xmlns:a16="http://schemas.microsoft.com/office/drawing/2014/main" id="{2F422E2B-F9F5-3905-746F-1B444A774B85}"/>
             </a:ext>
           </a:extLst>
         </p:cNvPr>
@@ -949,7 +950,7 @@
           <p:cNvPr id="2" name="슬라이드 이미지 개체 틀 1">
             <a:extLst>
               <a:ext uri="{FF2B5EF4-FFF2-40B4-BE49-F238E27FC236}">
-                <a16:creationId xmlns:a16="http://schemas.microsoft.com/office/drawing/2014/main" id="{B1766512-6D1E-5637-7FB6-145B2BC2F76E}"/>
+                <a16:creationId xmlns:a16="http://schemas.microsoft.com/office/drawing/2014/main" id="{F73ADBB6-BC05-1ECD-B375-6A7B60FA2FCB}"/>
               </a:ext>
             </a:extLst>
           </p:cNvPr>
@@ -967,7 +968,7 @@
           <p:cNvPr id="3" name="슬라이드 노트 개체 틀 2">
             <a:extLst>
               <a:ext uri="{FF2B5EF4-FFF2-40B4-BE49-F238E27FC236}">
-                <a16:creationId xmlns:a16="http://schemas.microsoft.com/office/drawing/2014/main" id="{90282F23-1481-2EB5-07C4-F32AE9B8E0E3}"/>
+                <a16:creationId xmlns:a16="http://schemas.microsoft.com/office/drawing/2014/main" id="{7A87E134-381E-7C1E-5A85-F389438EDBB1}"/>
               </a:ext>
             </a:extLst>
           </p:cNvPr>
@@ -1005,7 +1006,7 @@
           <p:cNvPr id="4" name="슬라이드 번호 개체 틀 3">
             <a:extLst>
               <a:ext uri="{FF2B5EF4-FFF2-40B4-BE49-F238E27FC236}">
-                <a16:creationId xmlns:a16="http://schemas.microsoft.com/office/drawing/2014/main" id="{3BB7820B-2738-EB31-1F5A-31599CF83BC4}"/>
+                <a16:creationId xmlns:a16="http://schemas.microsoft.com/office/drawing/2014/main" id="{47CACB6B-0AE0-E08E-AED2-A5891FD9FF7D}"/>
               </a:ext>
             </a:extLst>
           </p:cNvPr>
@@ -1032,7 +1033,7 @@
     </p:spTree>
     <p:extLst>
       <p:ext uri="{BB962C8B-B14F-4D97-AF65-F5344CB8AC3E}">
-        <p14:creationId xmlns:p14="http://schemas.microsoft.com/office/powerpoint/2010/main" val="3735902976"/>
+        <p14:creationId xmlns:p14="http://schemas.microsoft.com/office/powerpoint/2010/main" val="580113452"/>
       </p:ext>
     </p:extLst>
   </p:cSld>
@@ -1154,6 +1155,127 @@
     <p:extLst>
       <p:ext uri="{BB962C8B-B14F-4D97-AF65-F5344CB8AC3E}">
         <p14:creationId xmlns:p14="http://schemas.microsoft.com/office/powerpoint/2010/main" val="298870507"/>
+      </p:ext>
+    </p:extLst>
+  </p:cSld>
+  <p:clrMapOvr>
+    <a:masterClrMapping/>
+  </p:clrMapOvr>
+</p:notes>
+</file>
+
+<file path=ppt/notesSlides/notesSlide7.xml><?xml version="1.0" encoding="utf-8"?>
+<p:notes xmlns:a="http://schemas.openxmlformats.org/drawingml/2006/main" xmlns:r="http://schemas.openxmlformats.org/officeDocument/2006/relationships" xmlns:p="http://schemas.openxmlformats.org/presentationml/2006/main">
+  <p:cSld>
+    <p:spTree>
+      <p:nvGrpSpPr>
+        <p:cNvPr id="1" name="">
+          <a:extLst>
+            <a:ext uri="{FF2B5EF4-FFF2-40B4-BE49-F238E27FC236}">
+              <a16:creationId xmlns:a16="http://schemas.microsoft.com/office/drawing/2014/main" id="{979E6F6C-FA06-102D-D6F5-5CD54043758F}"/>
+            </a:ext>
+          </a:extLst>
+        </p:cNvPr>
+        <p:cNvGrpSpPr/>
+        <p:nvPr/>
+      </p:nvGrpSpPr>
+      <p:grpSpPr>
+        <a:xfrm>
+          <a:off x="0" y="0"/>
+          <a:ext cx="0" cy="0"/>
+          <a:chOff x="0" y="0"/>
+          <a:chExt cx="0" cy="0"/>
+        </a:xfrm>
+      </p:grpSpPr>
+      <p:sp>
+        <p:nvSpPr>
+          <p:cNvPr id="2" name="슬라이드 이미지 개체 틀 1">
+            <a:extLst>
+              <a:ext uri="{FF2B5EF4-FFF2-40B4-BE49-F238E27FC236}">
+                <a16:creationId xmlns:a16="http://schemas.microsoft.com/office/drawing/2014/main" id="{7876CEB7-429F-5B0A-C8FB-364588C53F62}"/>
+              </a:ext>
+            </a:extLst>
+          </p:cNvPr>
+          <p:cNvSpPr>
+            <a:spLocks noGrp="1" noRot="1" noChangeAspect="1"/>
+          </p:cNvSpPr>
+          <p:nvPr>
+            <p:ph type="sldImg"/>
+          </p:nvPr>
+        </p:nvSpPr>
+        <p:spPr/>
+      </p:sp>
+      <p:sp>
+        <p:nvSpPr>
+          <p:cNvPr id="3" name="슬라이드 노트 개체 틀 2">
+            <a:extLst>
+              <a:ext uri="{FF2B5EF4-FFF2-40B4-BE49-F238E27FC236}">
+                <a16:creationId xmlns:a16="http://schemas.microsoft.com/office/drawing/2014/main" id="{87BD3555-A79D-0B6C-85B2-8C56C4DAA795}"/>
+              </a:ext>
+            </a:extLst>
+          </p:cNvPr>
+          <p:cNvSpPr>
+            <a:spLocks noGrp="1"/>
+          </p:cNvSpPr>
+          <p:nvPr>
+            <p:ph type="body" idx="1"/>
+          </p:nvPr>
+        </p:nvSpPr>
+        <p:spPr/>
+        <p:txBody>
+          <a:bodyPr/>
+          <a:lstStyle/>
+          <a:p>
+            <a:pPr algn="just" latinLnBrk="1">
+              <a:lnSpc>
+                <a:spcPct val="107000"/>
+              </a:lnSpc>
+              <a:spcAft>
+                <a:spcPts val="800"/>
+              </a:spcAft>
+            </a:pPr>
+            <a:endParaRPr lang="ko-KR" altLang="ko-KR" sz="1800" kern="100" dirty="0">
+              <a:effectLst/>
+              <a:latin typeface="맑은 고딕" panose="020B0503020000020004" pitchFamily="50" charset="-127"/>
+              <a:ea typeface="맑은 고딕" panose="020B0503020000020004" pitchFamily="50" charset="-127"/>
+              <a:cs typeface="Times New Roman" panose="02020603050405020304" pitchFamily="18" charset="0"/>
+            </a:endParaRPr>
+          </a:p>
+        </p:txBody>
+      </p:sp>
+      <p:sp>
+        <p:nvSpPr>
+          <p:cNvPr id="4" name="슬라이드 번호 개체 틀 3">
+            <a:extLst>
+              <a:ext uri="{FF2B5EF4-FFF2-40B4-BE49-F238E27FC236}">
+                <a16:creationId xmlns:a16="http://schemas.microsoft.com/office/drawing/2014/main" id="{AE8A428D-04BE-F73E-AFE0-7E46B45FC13C}"/>
+              </a:ext>
+            </a:extLst>
+          </p:cNvPr>
+          <p:cNvSpPr>
+            <a:spLocks noGrp="1"/>
+          </p:cNvSpPr>
+          <p:nvPr>
+            <p:ph type="sldNum" sz="quarter" idx="5"/>
+          </p:nvPr>
+        </p:nvSpPr>
+        <p:spPr/>
+        <p:txBody>
+          <a:bodyPr/>
+          <a:lstStyle/>
+          <a:p>
+            <a:fld id="{9C89E238-56E2-498F-AF52-A01BE2759D45}" type="slidenum">
+              <a:rPr lang="ko-KR" altLang="en-US" smtClean="0"/>
+              <a:t>8</a:t>
+            </a:fld>
+            <a:endParaRPr lang="ko-KR" altLang="en-US"/>
+          </a:p>
+        </p:txBody>
+      </p:sp>
+    </p:spTree>
+    <p:extLst>
+      <p:ext uri="{BB962C8B-B14F-4D97-AF65-F5344CB8AC3E}">
+        <p14:creationId xmlns:p14="http://schemas.microsoft.com/office/powerpoint/2010/main" val="976133571"/>
       </p:ext>
     </p:extLst>
   </p:cSld>
@@ -9026,7 +9148,7 @@
         </p:blipFill>
         <p:spPr>
           <a:xfrm>
-            <a:off x="293699" y="956281"/>
+            <a:off x="179399" y="1128847"/>
             <a:ext cx="8556601" cy="1823603"/>
           </a:xfrm>
           <a:prstGeom prst="rect">
@@ -9192,6 +9314,31 @@
                             </m:r>
                           </m:sub>
                         </m:sSub>
+                        <m:sSub>
+                          <m:sSubPr>
+                            <m:ctrlPr>
+                              <a:rPr lang="en-US" altLang="ko-KR" sz="1800" b="0" i="1" smtClean="0">
+                                <a:latin typeface="Cambria Math" panose="02040503050406030204" pitchFamily="18" charset="0"/>
+                              </a:rPr>
+                            </m:ctrlPr>
+                          </m:sSubPr>
+                          <m:e>
+                            <m:r>
+                              <a:rPr lang="en-US" altLang="ko-KR" sz="1800" b="0" i="1" smtClean="0">
+                                <a:latin typeface="Cambria Math" panose="02040503050406030204" pitchFamily="18" charset="0"/>
+                              </a:rPr>
+                              <m:t>𝑃</m:t>
+                            </m:r>
+                          </m:e>
+                          <m:sub>
+                            <m:r>
+                              <a:rPr lang="en-US" altLang="ko-KR" sz="1800" b="0" i="1" smtClean="0">
+                                <a:latin typeface="Cambria Math" panose="02040503050406030204" pitchFamily="18" charset="0"/>
+                              </a:rPr>
+                              <m:t>𝑚</m:t>
+                            </m:r>
+                          </m:sub>
+                        </m:sSub>
                       </m:num>
                       <m:den>
                         <m:sSup>
@@ -9293,6 +9440,31 @@
                             <m:sSub>
                               <m:sSubPr>
                                 <m:ctrlPr>
+                                  <a:rPr lang="en-US" altLang="ko-KR" sz="1800" b="0" i="1" smtClean="0">
+                                    <a:latin typeface="Cambria Math" panose="02040503050406030204" pitchFamily="18" charset="0"/>
+                                  </a:rPr>
+                                </m:ctrlPr>
+                              </m:sSubPr>
+                              <m:e>
+                                <m:r>
+                                  <a:rPr lang="en-US" altLang="ko-KR" sz="1800" b="0" i="1" smtClean="0">
+                                    <a:latin typeface="Cambria Math" panose="02040503050406030204" pitchFamily="18" charset="0"/>
+                                  </a:rPr>
+                                  <m:t>𝑃</m:t>
+                                </m:r>
+                              </m:e>
+                              <m:sub>
+                                <m:r>
+                                  <a:rPr lang="en-US" altLang="ko-KR" sz="1800" b="0" i="1" smtClean="0">
+                                    <a:latin typeface="Cambria Math" panose="02040503050406030204" pitchFamily="18" charset="0"/>
+                                  </a:rPr>
+                                  <m:t>𝑚</m:t>
+                                </m:r>
+                              </m:sub>
+                            </m:sSub>
+                            <m:sSub>
+                              <m:sSubPr>
+                                <m:ctrlPr>
                                   <a:rPr lang="en-US" altLang="ko-KR" sz="1800" i="1" smtClean="0">
                                     <a:latin typeface="Cambria Math" panose="02040503050406030204" pitchFamily="18" charset="0"/>
                                   </a:rPr>
@@ -9343,6 +9515,31 @@
                                 <a:latin typeface="Cambria Math" panose="02040503050406030204" pitchFamily="18" charset="0"/>
                               </a:rPr>
                               <m:t>𝐾</m:t>
+                            </m:r>
+                          </m:e>
+                          <m:sub>
+                            <m:r>
+                              <a:rPr lang="en-US" altLang="ko-KR" sz="1800" b="0" i="1" smtClean="0">
+                                <a:latin typeface="Cambria Math" panose="02040503050406030204" pitchFamily="18" charset="0"/>
+                              </a:rPr>
+                              <m:t>𝑚</m:t>
+                            </m:r>
+                          </m:sub>
+                        </m:sSub>
+                        <m:sSub>
+                          <m:sSubPr>
+                            <m:ctrlPr>
+                              <a:rPr lang="en-US" altLang="ko-KR" sz="1800" b="0" i="1" smtClean="0">
+                                <a:latin typeface="Cambria Math" panose="02040503050406030204" pitchFamily="18" charset="0"/>
+                              </a:rPr>
+                            </m:ctrlPr>
+                          </m:sSubPr>
+                          <m:e>
+                            <m:r>
+                              <a:rPr lang="en-US" altLang="ko-KR" sz="1800" b="0" i="1" smtClean="0">
+                                <a:latin typeface="Cambria Math" panose="02040503050406030204" pitchFamily="18" charset="0"/>
+                              </a:rPr>
+                              <m:t>𝑃</m:t>
                             </m:r>
                           </m:e>
                           <m:sub>
@@ -9651,6 +9848,31 @@
                             </m:r>
                           </m:sub>
                         </m:sSub>
+                        <m:sSub>
+                          <m:sSubPr>
+                            <m:ctrlPr>
+                              <a:rPr lang="en-US" altLang="ko-KR" sz="1800" b="0" i="1" smtClean="0">
+                                <a:latin typeface="Cambria Math" panose="02040503050406030204" pitchFamily="18" charset="0"/>
+                              </a:rPr>
+                            </m:ctrlPr>
+                          </m:sSubPr>
+                          <m:e>
+                            <m:r>
+                              <a:rPr lang="en-US" altLang="ko-KR" sz="1800" b="0" i="1" smtClean="0">
+                                <a:latin typeface="Cambria Math" panose="02040503050406030204" pitchFamily="18" charset="0"/>
+                              </a:rPr>
+                              <m:t>𝑃</m:t>
+                            </m:r>
+                          </m:e>
+                          <m:sub>
+                            <m:r>
+                              <a:rPr lang="en-US" altLang="ko-KR" sz="1800" b="0" i="1" smtClean="0">
+                                <a:latin typeface="Cambria Math" panose="02040503050406030204" pitchFamily="18" charset="0"/>
+                              </a:rPr>
+                              <m:t>𝑚</m:t>
+                            </m:r>
+                          </m:sub>
+                        </m:sSub>
                       </m:den>
                     </m:f>
                   </m:oMath>
@@ -9806,6 +10028,31 @@
                             </m:r>
                           </m:sub>
                         </m:sSub>
+                        <m:sSub>
+                          <m:sSubPr>
+                            <m:ctrlPr>
+                              <a:rPr lang="en-US" altLang="ko-KR" sz="1600" b="0" i="1" smtClean="0">
+                                <a:latin typeface="Cambria Math" panose="02040503050406030204" pitchFamily="18" charset="0"/>
+                              </a:rPr>
+                            </m:ctrlPr>
+                          </m:sSubPr>
+                          <m:e>
+                            <m:r>
+                              <a:rPr lang="en-US" altLang="ko-KR" sz="1600" b="0" i="1" smtClean="0">
+                                <a:latin typeface="Cambria Math" panose="02040503050406030204" pitchFamily="18" charset="0"/>
+                              </a:rPr>
+                              <m:t>𝑃</m:t>
+                            </m:r>
+                          </m:e>
+                          <m:sub>
+                            <m:r>
+                              <a:rPr lang="en-US" altLang="ko-KR" sz="1600" b="0" i="1" smtClean="0">
+                                <a:latin typeface="Cambria Math" panose="02040503050406030204" pitchFamily="18" charset="0"/>
+                              </a:rPr>
+                              <m:t>𝑚</m:t>
+                            </m:r>
+                          </m:sub>
+                        </m:sSub>
                       </m:den>
                     </m:f>
                   </m:oMath>
@@ -9996,9 +10243,6 @@
                 </a:lvl1pPr>
               </a:lstStyle>
               <a:p>
-                <a:pPr marL="342900" indent="-342900">
-                  <a:buAutoNum type="alphaUcPeriod"/>
-                </a:pPr>
                 <a:r>
                   <a:rPr lang="en-US" altLang="ko-KR" sz="1600" b="1" dirty="0">
                     <a:latin typeface="+mn-lt"/>
@@ -10011,7 +10255,13 @@
                   <a:rPr lang="en-US" altLang="ko-KR" sz="1600" dirty="0">
                     <a:latin typeface="+mn-lt"/>
                   </a:rPr>
-                  <a:t>         Relative Stability</a:t>
+                  <a:t>         </a:t>
+                </a:r>
+                <a:r>
+                  <a:rPr lang="en-US" altLang="ko-KR" sz="1600" b="1" dirty="0">
+                    <a:latin typeface="+mn-lt"/>
+                  </a:rPr>
+                  <a:t>Relative Stability</a:t>
                 </a:r>
               </a:p>
               <a:p>
@@ -10181,20 +10431,41 @@
                       <a:rPr lang="en-US" altLang="ko-KR" sz="1600" b="0" i="1" smtClean="0">
                         <a:latin typeface="Cambria Math" panose="02040503050406030204" pitchFamily="18" charset="0"/>
                       </a:rPr>
-                      <m:t>&gt;</m:t>
+                      <m:t>&gt;   </m:t>
                     </m:r>
                     <m:r>
                       <a:rPr lang="en-US" altLang="ko-KR" sz="1600" i="1">
                         <a:latin typeface="Cambria Math" panose="02040503050406030204" pitchFamily="18" charset="0"/>
                       </a:rPr>
-                      <m:t>0.59 [−] </m:t>
+                      <m:t>0.59 </m:t>
                     </m:r>
+                    <m:d>
+                      <m:dPr>
+                        <m:begChr m:val="["/>
+                        <m:endChr m:val="]"/>
+                        <m:ctrlPr>
+                          <a:rPr lang="en-US" altLang="ko-KR" sz="1600" i="1">
+                            <a:latin typeface="Cambria Math" panose="02040503050406030204" pitchFamily="18" charset="0"/>
+                          </a:rPr>
+                        </m:ctrlPr>
+                      </m:dPr>
+                      <m:e>
+                        <m:r>
+                          <a:rPr lang="en-US" altLang="ko-KR" sz="1600" i="1">
+                            <a:latin typeface="Cambria Math" panose="02040503050406030204" pitchFamily="18" charset="0"/>
+                          </a:rPr>
+                          <m:t>−</m:t>
+                        </m:r>
+                      </m:e>
+                    </m:d>
                   </m:oMath>
                 </a14:m>
-                <a:endParaRPr lang="en-US" altLang="ko-KR" sz="1600" dirty="0"/>
+                <a:endParaRPr lang="en-US" altLang="ko-KR" sz="1600" i="1" dirty="0">
+                  <a:latin typeface="Cambria Math" panose="02040503050406030204" pitchFamily="18" charset="0"/>
+                </a:endParaRPr>
               </a:p>
               <a:p>
-                <a:pPr lvl="1">
+                <a:pPr lvl="2">
                   <a:lnSpc>
                     <a:spcPct val="150000"/>
                   </a:lnSpc>
@@ -10208,26 +10479,14 @@
                       <m:sSub>
                         <m:sSubPr>
                           <m:ctrlPr>
-                            <a:rPr lang="en-US" altLang="ko-KR" sz="1600" i="1">
+                            <a:rPr lang="en-US" altLang="ko-KR" sz="1600" b="0" i="1" smtClean="0">
                               <a:latin typeface="Cambria Math" panose="02040503050406030204" pitchFamily="18" charset="0"/>
                             </a:rPr>
                           </m:ctrlPr>
                         </m:sSubPr>
                         <m:e>
                           <m:r>
-                            <a:rPr lang="en-US" altLang="ko-KR" sz="1600" i="1">
-                              <a:latin typeface="Cambria Math" panose="02040503050406030204" pitchFamily="18" charset="0"/>
-                            </a:rPr>
-                            <m:t>−0.59</m:t>
-                          </m:r>
-                          <m:r>
                             <a:rPr lang="en-US" altLang="ko-KR" sz="1600" b="0" i="1" smtClean="0">
-                              <a:latin typeface="Cambria Math" panose="02040503050406030204" pitchFamily="18" charset="0"/>
-                            </a:rPr>
-                            <m:t>&gt;</m:t>
-                          </m:r>
-                          <m:r>
-                            <a:rPr lang="en-US" altLang="ko-KR" sz="1600" i="1">
                               <a:latin typeface="Cambria Math" panose="02040503050406030204" pitchFamily="18" charset="0"/>
                             </a:rPr>
                             <m:t>𝜁</m:t>
@@ -10235,13 +10494,19 @@
                         </m:e>
                         <m:sub>
                           <m:r>
-                            <a:rPr lang="en-US" altLang="ko-KR" sz="1600" i="1">
+                            <a:rPr lang="en-US" altLang="ko-KR" sz="1600" b="0" i="1" smtClean="0">
                               <a:latin typeface="Cambria Math" panose="02040503050406030204" pitchFamily="18" charset="0"/>
                             </a:rPr>
                             <m:t>𝑐</m:t>
                           </m:r>
                         </m:sub>
                       </m:sSub>
+                      <m:r>
+                        <a:rPr lang="en-US" altLang="ko-KR" sz="1600" b="0" i="1" smtClean="0">
+                          <a:latin typeface="Cambria Math" panose="02040503050406030204" pitchFamily="18" charset="0"/>
+                        </a:rPr>
+                        <m:t>&lt;−0.59 [−]</m:t>
+                      </m:r>
                     </m:oMath>
                   </m:oMathPara>
                 </a14:m>
@@ -10410,8 +10675,8 @@
                   </a:lnSpc>
                 </a:pPr>
                 <a:r>
-                  <a:rPr lang="en-US" altLang="ko-KR" sz="1600" dirty="0"/>
-                  <a:t>Result</a:t>
+                  <a:rPr lang="en-US" altLang="ko-KR" sz="1600" b="1" dirty="0"/>
+                  <a:t>Selected Values</a:t>
                 </a:r>
               </a:p>
               <a:p>
@@ -10660,8 +10925,8 @@
         </p:blipFill>
         <p:spPr>
           <a:xfrm>
-            <a:off x="4495026" y="1110488"/>
-            <a:ext cx="4064774" cy="3911122"/>
+            <a:off x="5301476" y="964438"/>
+            <a:ext cx="2934295" cy="2823376"/>
           </a:xfrm>
           <a:prstGeom prst="rect">
             <a:avLst/>
@@ -10682,8 +10947,8 @@
         </p:nvSpPr>
         <p:spPr>
           <a:xfrm>
-            <a:off x="7230533" y="2158562"/>
-            <a:ext cx="541867" cy="220133"/>
+            <a:off x="7277101" y="1710887"/>
+            <a:ext cx="575940" cy="149870"/>
           </a:xfrm>
           <a:prstGeom prst="rect">
             <a:avLst/>
@@ -10735,8 +11000,8 @@
         </p:nvSpPr>
         <p:spPr>
           <a:xfrm>
-            <a:off x="5621866" y="4334496"/>
-            <a:ext cx="609601" cy="220133"/>
+            <a:off x="6119282" y="3295405"/>
+            <a:ext cx="605367" cy="149870"/>
           </a:xfrm>
           <a:prstGeom prst="rect">
             <a:avLst/>
@@ -10768,7 +11033,7 @@
             <a:pPr algn="ctr"/>
             <a:r>
               <a:rPr lang="en-US" altLang="ko-KR" sz="1000" dirty="0"/>
-              <a:t>- 0.59</a:t>
+              <a:t>-0.59</a:t>
             </a:r>
             <a:endParaRPr lang="ko-KR" altLang="en-US" sz="1000" dirty="0"/>
           </a:p>
@@ -10788,8 +11053,8 @@
         </p:nvSpPr>
         <p:spPr>
           <a:xfrm>
-            <a:off x="5588000" y="1599762"/>
-            <a:ext cx="541867" cy="220133"/>
+            <a:off x="6102350" y="1320362"/>
+            <a:ext cx="462725" cy="190938"/>
           </a:xfrm>
           <a:prstGeom prst="rect">
             <a:avLst/>
@@ -10880,6 +11145,212 @@
             </a:pPr>
             <a:endParaRPr lang="ko-KR" altLang="en-US" sz="1000" b="1" dirty="0">
               <a:latin typeface="+mn-lt"/>
+            </a:endParaRPr>
+          </a:p>
+        </p:txBody>
+      </p:sp>
+      <p:pic>
+        <p:nvPicPr>
+          <p:cNvPr id="3" name="그림 2">
+            <a:extLst>
+              <a:ext uri="{FF2B5EF4-FFF2-40B4-BE49-F238E27FC236}">
+                <a16:creationId xmlns:a16="http://schemas.microsoft.com/office/drawing/2014/main" id="{C0B3B871-D8E9-8D52-FED1-44A777644BBA}"/>
+              </a:ext>
+            </a:extLst>
+          </p:cNvPr>
+          <p:cNvPicPr>
+            <a:picLocks noChangeAspect="1"/>
+          </p:cNvPicPr>
+          <p:nvPr/>
+        </p:nvPicPr>
+        <p:blipFill>
+          <a:blip r:embed="rId5"/>
+          <a:stretch>
+            <a:fillRect/>
+          </a:stretch>
+        </p:blipFill>
+        <p:spPr>
+          <a:xfrm>
+            <a:off x="3684572" y="3634739"/>
+            <a:ext cx="5191155" cy="2718180"/>
+          </a:xfrm>
+          <a:prstGeom prst="rect">
+            <a:avLst/>
+          </a:prstGeom>
+        </p:spPr>
+      </p:pic>
+      <p:sp>
+        <p:nvSpPr>
+          <p:cNvPr id="4" name="곱하기 기호 3">
+            <a:extLst>
+              <a:ext uri="{FF2B5EF4-FFF2-40B4-BE49-F238E27FC236}">
+                <a16:creationId xmlns:a16="http://schemas.microsoft.com/office/drawing/2014/main" id="{4495411C-C30E-17F9-ECE4-CB4A429F25C7}"/>
+              </a:ext>
+            </a:extLst>
+          </p:cNvPr>
+          <p:cNvSpPr/>
+          <p:nvPr/>
+        </p:nvSpPr>
+        <p:spPr>
+          <a:xfrm>
+            <a:off x="7791451" y="3909392"/>
+            <a:ext cx="152400" cy="133350"/>
+          </a:xfrm>
+          <a:prstGeom prst="mathMultiply">
+            <a:avLst/>
+          </a:prstGeom>
+          <a:ln>
+            <a:solidFill>
+              <a:schemeClr val="accent1"/>
+            </a:solidFill>
+          </a:ln>
+        </p:spPr>
+        <p:style>
+          <a:lnRef idx="2">
+            <a:schemeClr val="accent1">
+              <a:shade val="15000"/>
+            </a:schemeClr>
+          </a:lnRef>
+          <a:fillRef idx="1">
+            <a:schemeClr val="accent1"/>
+          </a:fillRef>
+          <a:effectRef idx="0">
+            <a:schemeClr val="accent1"/>
+          </a:effectRef>
+          <a:fontRef idx="minor">
+            <a:schemeClr val="lt1"/>
+          </a:fontRef>
+        </p:style>
+        <p:txBody>
+          <a:bodyPr rtlCol="0" anchor="ctr"/>
+          <a:lstStyle/>
+          <a:p>
+            <a:pPr algn="ctr"/>
+            <a:endParaRPr lang="ko-KR" altLang="en-US">
+              <a:ln w="0"/>
+              <a:solidFill>
+                <a:schemeClr val="accent1"/>
+              </a:solidFill>
+              <a:effectLst>
+                <a:outerShdw blurRad="38100" dist="25400" dir="5400000" algn="ctr" rotWithShape="0">
+                  <a:srgbClr val="6E747A">
+                    <a:alpha val="43000"/>
+                  </a:srgbClr>
+                </a:outerShdw>
+              </a:effectLst>
+            </a:endParaRPr>
+          </a:p>
+        </p:txBody>
+      </p:sp>
+      <p:sp>
+        <p:nvSpPr>
+          <p:cNvPr id="5" name="곱하기 기호 4">
+            <a:extLst>
+              <a:ext uri="{FF2B5EF4-FFF2-40B4-BE49-F238E27FC236}">
+                <a16:creationId xmlns:a16="http://schemas.microsoft.com/office/drawing/2014/main" id="{6753BFDA-FFD5-7F6E-08AF-F7ACB15001E7}"/>
+              </a:ext>
+            </a:extLst>
+          </p:cNvPr>
+          <p:cNvSpPr/>
+          <p:nvPr/>
+        </p:nvSpPr>
+        <p:spPr>
+          <a:xfrm>
+            <a:off x="7805209" y="5900948"/>
+            <a:ext cx="152400" cy="133350"/>
+          </a:xfrm>
+          <a:prstGeom prst="mathMultiply">
+            <a:avLst/>
+          </a:prstGeom>
+          <a:ln>
+            <a:solidFill>
+              <a:schemeClr val="accent1"/>
+            </a:solidFill>
+          </a:ln>
+        </p:spPr>
+        <p:style>
+          <a:lnRef idx="2">
+            <a:schemeClr val="accent1">
+              <a:shade val="15000"/>
+            </a:schemeClr>
+          </a:lnRef>
+          <a:fillRef idx="1">
+            <a:schemeClr val="accent1"/>
+          </a:fillRef>
+          <a:effectRef idx="0">
+            <a:schemeClr val="accent1"/>
+          </a:effectRef>
+          <a:fontRef idx="minor">
+            <a:schemeClr val="lt1"/>
+          </a:fontRef>
+        </p:style>
+        <p:txBody>
+          <a:bodyPr rtlCol="0" anchor="ctr"/>
+          <a:lstStyle/>
+          <a:p>
+            <a:pPr algn="ctr"/>
+            <a:endParaRPr lang="ko-KR" altLang="en-US">
+              <a:ln w="0"/>
+              <a:solidFill>
+                <a:schemeClr val="accent1"/>
+              </a:solidFill>
+              <a:effectLst>
+                <a:outerShdw blurRad="38100" dist="25400" dir="5400000" algn="ctr" rotWithShape="0">
+                  <a:srgbClr val="6E747A">
+                    <a:alpha val="43000"/>
+                  </a:srgbClr>
+                </a:outerShdw>
+              </a:effectLst>
+            </a:endParaRPr>
+          </a:p>
+        </p:txBody>
+      </p:sp>
+      <p:sp>
+        <p:nvSpPr>
+          <p:cNvPr id="6" name="원형: 비어 있음 5">
+            <a:extLst>
+              <a:ext uri="{FF2B5EF4-FFF2-40B4-BE49-F238E27FC236}">
+                <a16:creationId xmlns:a16="http://schemas.microsoft.com/office/drawing/2014/main" id="{ABEB0A3F-3207-1DDD-937C-D2B0A3C8E93D}"/>
+              </a:ext>
+            </a:extLst>
+          </p:cNvPr>
+          <p:cNvSpPr/>
+          <p:nvPr/>
+        </p:nvSpPr>
+        <p:spPr>
+          <a:xfrm>
+            <a:off x="4343400" y="4907173"/>
+            <a:ext cx="74613" cy="74792"/>
+          </a:xfrm>
+          <a:prstGeom prst="donut">
+            <a:avLst/>
+          </a:prstGeom>
+        </p:spPr>
+        <p:style>
+          <a:lnRef idx="2">
+            <a:schemeClr val="accent1">
+              <a:shade val="15000"/>
+            </a:schemeClr>
+          </a:lnRef>
+          <a:fillRef idx="1">
+            <a:schemeClr val="accent1"/>
+          </a:fillRef>
+          <a:effectRef idx="0">
+            <a:schemeClr val="accent1"/>
+          </a:effectRef>
+          <a:fontRef idx="minor">
+            <a:schemeClr val="lt1"/>
+          </a:fontRef>
+        </p:style>
+        <p:txBody>
+          <a:bodyPr rtlCol="0" anchor="ctr"/>
+          <a:lstStyle/>
+          <a:p>
+            <a:pPr algn="ctr"/>
+            <a:endParaRPr lang="ko-KR" altLang="en-US" dirty="0">
+              <a:solidFill>
+                <a:schemeClr val="tx1"/>
+              </a:solidFill>
             </a:endParaRPr>
           </a:p>
         </p:txBody>
@@ -10913,7 +11384,7 @@
         <p:cNvPr id="1" name="">
           <a:extLst>
             <a:ext uri="{FF2B5EF4-FFF2-40B4-BE49-F238E27FC236}">
-              <a16:creationId xmlns:a16="http://schemas.microsoft.com/office/drawing/2014/main" id="{FC1EE620-038D-DE8B-177B-C929795ED2C3}"/>
+              <a16:creationId xmlns:a16="http://schemas.microsoft.com/office/drawing/2014/main" id="{6F7D5CCC-712B-89A8-31FC-1FB11C5F2501}"/>
             </a:ext>
           </a:extLst>
         </p:cNvPr>
@@ -10928,12 +11399,77 @@
           <a:chExt cx="0" cy="0"/>
         </a:xfrm>
       </p:grpSpPr>
+      <p:sp>
+        <p:nvSpPr>
+          <p:cNvPr id="7" name="제목 6">
+            <a:extLst>
+              <a:ext uri="{FF2B5EF4-FFF2-40B4-BE49-F238E27FC236}">
+                <a16:creationId xmlns:a16="http://schemas.microsoft.com/office/drawing/2014/main" id="{A272025F-FBF7-B791-216C-2F0A7D6F5247}"/>
+              </a:ext>
+            </a:extLst>
+          </p:cNvPr>
+          <p:cNvSpPr>
+            <a:spLocks noGrp="1"/>
+          </p:cNvSpPr>
+          <p:nvPr>
+            <p:ph type="title"/>
+          </p:nvPr>
+        </p:nvSpPr>
+        <p:spPr/>
+        <p:txBody>
+          <a:bodyPr>
+            <a:normAutofit fontScale="90000"/>
+          </a:bodyPr>
+          <a:lstStyle/>
+          <a:p>
+            <a:r>
+              <a:rPr lang="en-US" altLang="ko-KR" b="1" dirty="0">
+                <a:latin typeface="+mn-lt"/>
+                <a:ea typeface="나눔스퀘어 Bold" panose="020B0600000101010101" pitchFamily="50" charset="-127"/>
+              </a:rPr>
+              <a:t>4. Design Model</a:t>
+            </a:r>
+            <a:endParaRPr lang="ko-KR" altLang="en-US" b="1" dirty="0">
+              <a:latin typeface="+mj-ea"/>
+            </a:endParaRPr>
+          </a:p>
+        </p:txBody>
+      </p:sp>
+      <p:sp>
+        <p:nvSpPr>
+          <p:cNvPr id="2" name="슬라이드 번호 개체 틀 1">
+            <a:extLst>
+              <a:ext uri="{FF2B5EF4-FFF2-40B4-BE49-F238E27FC236}">
+                <a16:creationId xmlns:a16="http://schemas.microsoft.com/office/drawing/2014/main" id="{84C19963-35BA-8791-23E3-8C3F19584C50}"/>
+              </a:ext>
+            </a:extLst>
+          </p:cNvPr>
+          <p:cNvSpPr>
+            <a:spLocks noGrp="1"/>
+          </p:cNvSpPr>
+          <p:nvPr>
+            <p:ph type="sldNum" sz="quarter" idx="12"/>
+          </p:nvPr>
+        </p:nvSpPr>
+        <p:spPr/>
+        <p:txBody>
+          <a:bodyPr/>
+          <a:lstStyle/>
+          <a:p>
+            <a:fld id="{57A7753D-33D3-4DE4-B918-257BB52428D1}" type="slidenum">
+              <a:rPr lang="ko-KR" altLang="en-US" smtClean="0"/>
+              <a:t>5</a:t>
+            </a:fld>
+            <a:endParaRPr lang="ko-KR" altLang="en-US"/>
+          </a:p>
+        </p:txBody>
+      </p:sp>
       <p:pic>
         <p:nvPicPr>
-          <p:cNvPr id="15" name="그림 14">
+          <p:cNvPr id="3" name="그림 2">
             <a:extLst>
               <a:ext uri="{FF2B5EF4-FFF2-40B4-BE49-F238E27FC236}">
-                <a16:creationId xmlns:a16="http://schemas.microsoft.com/office/drawing/2014/main" id="{CB129279-C8E3-EBAA-567D-89018F9E5C52}"/>
+                <a16:creationId xmlns:a16="http://schemas.microsoft.com/office/drawing/2014/main" id="{B53C4A7D-E83A-A69A-6783-47FBCC2FDB25}"/>
               </a:ext>
             </a:extLst>
           </p:cNvPr>
@@ -10950,276 +11486,43 @@
         </p:blipFill>
         <p:spPr>
           <a:xfrm>
-            <a:off x="3862372" y="1096116"/>
-            <a:ext cx="5191155" cy="2718180"/>
+            <a:off x="92616" y="1503662"/>
+            <a:ext cx="9033956" cy="1925338"/>
           </a:xfrm>
           <a:prstGeom prst="rect">
             <a:avLst/>
           </a:prstGeom>
         </p:spPr>
       </p:pic>
-      <p:sp>
-        <p:nvSpPr>
-          <p:cNvPr id="7" name="제목 6">
-            <a:extLst>
-              <a:ext uri="{FF2B5EF4-FFF2-40B4-BE49-F238E27FC236}">
-                <a16:creationId xmlns:a16="http://schemas.microsoft.com/office/drawing/2014/main" id="{C0EC842D-A96F-7B50-3A36-D8A4CA0EFCCA}"/>
-              </a:ext>
-            </a:extLst>
-          </p:cNvPr>
-          <p:cNvSpPr>
-            <a:spLocks noGrp="1"/>
-          </p:cNvSpPr>
-          <p:nvPr>
-            <p:ph type="title"/>
-          </p:nvPr>
-        </p:nvSpPr>
-        <p:spPr/>
-        <p:txBody>
-          <a:bodyPr>
-            <a:normAutofit fontScale="90000"/>
-          </a:bodyPr>
-          <a:lstStyle/>
-          <a:p>
-            <a:r>
-              <a:rPr lang="en-US" altLang="ko-KR" b="1" dirty="0">
-                <a:latin typeface="+mn-lt"/>
-                <a:ea typeface="나눔스퀘어 Bold" panose="020B0600000101010101" pitchFamily="50" charset="-127"/>
-              </a:rPr>
-              <a:t>3. Model Design Method</a:t>
-            </a:r>
-            <a:endParaRPr lang="ko-KR" altLang="en-US" b="1" dirty="0">
-              <a:latin typeface="+mn-lt"/>
-            </a:endParaRPr>
-          </a:p>
-        </p:txBody>
-      </p:sp>
       <mc:AlternateContent xmlns:mc="http://schemas.openxmlformats.org/markup-compatibility/2006" xmlns:a14="http://schemas.microsoft.com/office/drawing/2010/main">
         <mc:Choice Requires="a14">
           <p:sp>
             <p:nvSpPr>
-              <p:cNvPr id="10" name="제목 6">
+              <p:cNvPr id="4" name="TextBox 3">
                 <a:extLst>
                   <a:ext uri="{FF2B5EF4-FFF2-40B4-BE49-F238E27FC236}">
-                    <a16:creationId xmlns:a16="http://schemas.microsoft.com/office/drawing/2014/main" id="{5EA88BA0-7F43-CB8A-5542-6206F7900931}"/>
+                    <a16:creationId xmlns:a16="http://schemas.microsoft.com/office/drawing/2014/main" id="{15163CFD-F322-99C6-82E3-AA40B7C7693A}"/>
                   </a:ext>
                 </a:extLst>
               </p:cNvPr>
-              <p:cNvSpPr txBox="1">
-                <a:spLocks/>
-              </p:cNvSpPr>
+              <p:cNvSpPr txBox="1"/>
               <p:nvPr/>
             </p:nvSpPr>
             <p:spPr>
               <a:xfrm>
-                <a:off x="495300" y="902940"/>
-                <a:ext cx="4362450" cy="3624610"/>
+                <a:off x="2254250" y="3657735"/>
+                <a:ext cx="4387850" cy="1470724"/>
               </a:xfrm>
               <a:prstGeom prst="rect">
                 <a:avLst/>
               </a:prstGeom>
+              <a:noFill/>
             </p:spPr>
             <p:txBody>
-              <a:bodyPr vert="horz" lIns="91440" tIns="45720" rIns="91440" bIns="45720" rtlCol="0" anchor="t" anchorCtr="0">
-                <a:normAutofit fontScale="97500" lnSpcReduction="10000"/>
+              <a:bodyPr wrap="square" rtlCol="0">
+                <a:spAutoFit/>
               </a:bodyPr>
-              <a:lstStyle>
-                <a:lvl1pPr algn="l" defTabSz="914400" rtl="0" eaLnBrk="1" latinLnBrk="1" hangingPunct="1">
-                  <a:lnSpc>
-                    <a:spcPct val="90000"/>
-                  </a:lnSpc>
-                  <a:spcBef>
-                    <a:spcPct val="0"/>
-                  </a:spcBef>
-                  <a:buNone/>
-                  <a:defRPr sz="2400" kern="1200">
-                    <a:solidFill>
-                      <a:schemeClr val="tx1"/>
-                    </a:solidFill>
-                    <a:latin typeface="+mj-lt"/>
-                    <a:ea typeface="+mj-ea"/>
-                    <a:cs typeface="+mj-cs"/>
-                  </a:defRPr>
-                </a:lvl1pPr>
-              </a:lstStyle>
-              <a:p>
-                <a:pPr marL="342900" indent="-342900">
-                  <a:buAutoNum type="alphaUcPeriod" startAt="2"/>
-                </a:pPr>
-                <a:r>
-                  <a:rPr lang="en-US" altLang="ko-KR" sz="1600" b="1" dirty="0">
-                    <a:latin typeface="+mn-lt"/>
-                  </a:rPr>
-                  <a:t>Control Gain Design</a:t>
-                </a:r>
-              </a:p>
-              <a:p>
-                <a:pPr marL="342900" indent="-342900">
-                  <a:buAutoNum type="alphaUcPeriod" startAt="2"/>
-                </a:pPr>
-                <a:endParaRPr lang="en-US" altLang="ko-KR" sz="2100" b="1" dirty="0">
-                  <a:latin typeface="+mn-lt"/>
-                </a:endParaRPr>
-              </a:p>
-              <a:p>
-                <a:pPr marL="628650" lvl="1" indent="-171450">
-                  <a:buFontTx/>
-                  <a:buChar char="-"/>
-                </a:pPr>
-                <a:r>
-                  <a:rPr lang="en-US" altLang="ko-KR" sz="2100" dirty="0"/>
-                  <a:t>Selected Values</a:t>
-                </a:r>
-              </a:p>
-              <a:p>
-                <a:pPr marL="742950" lvl="1" indent="-285750">
-                  <a:buFont typeface="Arial" panose="020B0604020202020204" pitchFamily="34" charset="0"/>
-                  <a:buChar char="•"/>
-                </a:pPr>
-                <a14:m>
-                  <m:oMath xmlns:m="http://schemas.openxmlformats.org/officeDocument/2006/math">
-                    <m:sSub>
-                      <m:sSubPr>
-                        <m:ctrlPr>
-                          <a:rPr lang="en-US" altLang="ko-KR" sz="2100" i="1">
-                            <a:latin typeface="Cambria Math" panose="02040503050406030204" pitchFamily="18" charset="0"/>
-                          </a:rPr>
-                        </m:ctrlPr>
-                      </m:sSubPr>
-                      <m:e>
-                        <m:r>
-                          <a:rPr lang="en-US" altLang="ko-KR" sz="2100" i="1">
-                            <a:latin typeface="Cambria Math" panose="02040503050406030204" pitchFamily="18" charset="0"/>
-                          </a:rPr>
-                          <m:t>𝜔</m:t>
-                        </m:r>
-                      </m:e>
-                      <m:sub>
-                        <m:r>
-                          <a:rPr lang="en-US" altLang="ko-KR" sz="2100" i="1">
-                            <a:latin typeface="Cambria Math" panose="02040503050406030204" pitchFamily="18" charset="0"/>
-                          </a:rPr>
-                          <m:t>𝑛</m:t>
-                        </m:r>
-                      </m:sub>
-                    </m:sSub>
-                    <m:r>
-                      <a:rPr lang="en-US" altLang="ko-KR" sz="2100" i="1">
-                        <a:latin typeface="Cambria Math" panose="02040503050406030204" pitchFamily="18" charset="0"/>
-                      </a:rPr>
-                      <m:t>=35 [</m:t>
-                    </m:r>
-                    <m:r>
-                      <a:rPr lang="en-US" altLang="ko-KR" sz="2100" i="1">
-                        <a:latin typeface="Cambria Math" panose="02040503050406030204" pitchFamily="18" charset="0"/>
-                      </a:rPr>
-                      <m:t>𝑟𝑎𝑑</m:t>
-                    </m:r>
-                    <m:r>
-                      <a:rPr lang="en-US" altLang="ko-KR" sz="2100" i="1">
-                        <a:latin typeface="Cambria Math" panose="02040503050406030204" pitchFamily="18" charset="0"/>
-                      </a:rPr>
-                      <m:t>/</m:t>
-                    </m:r>
-                    <m:r>
-                      <a:rPr lang="en-US" altLang="ko-KR" sz="2100" i="1">
-                        <a:latin typeface="Cambria Math" panose="02040503050406030204" pitchFamily="18" charset="0"/>
-                      </a:rPr>
-                      <m:t>𝑠</m:t>
-                    </m:r>
-                    <m:r>
-                      <a:rPr lang="en-US" altLang="ko-KR" sz="2100" i="1">
-                        <a:latin typeface="Cambria Math" panose="02040503050406030204" pitchFamily="18" charset="0"/>
-                      </a:rPr>
-                      <m:t>]</m:t>
-                    </m:r>
-                  </m:oMath>
-                </a14:m>
-                <a:endParaRPr lang="en-US" altLang="ko-KR" sz="2100" i="1" dirty="0">
-                  <a:latin typeface="Cambria Math" panose="02040503050406030204" pitchFamily="18" charset="0"/>
-                </a:endParaRPr>
-              </a:p>
-              <a:p>
-                <a:pPr marL="742950" lvl="1" indent="-285750">
-                  <a:buFont typeface="Arial" panose="020B0604020202020204" pitchFamily="34" charset="0"/>
-                  <a:buChar char="•"/>
-                </a:pPr>
-                <a:endParaRPr lang="en-US" altLang="ko-KR" sz="2100" i="1" dirty="0">
-                  <a:latin typeface="Cambria Math" panose="02040503050406030204" pitchFamily="18" charset="0"/>
-                </a:endParaRPr>
-              </a:p>
-              <a:p>
-                <a:pPr marL="742950" lvl="1" indent="-285750">
-                  <a:buFont typeface="Arial" panose="020B0604020202020204" pitchFamily="34" charset="0"/>
-                  <a:buChar char="•"/>
-                </a:pPr>
-                <a14:m>
-                  <m:oMath xmlns:m="http://schemas.openxmlformats.org/officeDocument/2006/math">
-                    <m:r>
-                      <a:rPr lang="en-US" altLang="ko-KR" sz="2100" i="1">
-                        <a:latin typeface="Cambria Math" panose="02040503050406030204" pitchFamily="18" charset="0"/>
-                      </a:rPr>
-                      <m:t>𝜁</m:t>
-                    </m:r>
-                    <m:r>
-                      <a:rPr lang="en-US" altLang="ko-KR" sz="2100" i="1">
-                        <a:latin typeface="Cambria Math" panose="02040503050406030204" pitchFamily="18" charset="0"/>
-                      </a:rPr>
-                      <m:t>=0.7 </m:t>
-                    </m:r>
-                    <m:d>
-                      <m:dPr>
-                        <m:begChr m:val="["/>
-                        <m:endChr m:val="]"/>
-                        <m:ctrlPr>
-                          <a:rPr lang="en-US" altLang="ko-KR" sz="2100" i="1">
-                            <a:latin typeface="Cambria Math" panose="02040503050406030204" pitchFamily="18" charset="0"/>
-                          </a:rPr>
-                        </m:ctrlPr>
-                      </m:dPr>
-                      <m:e>
-                        <m:r>
-                          <a:rPr lang="en-US" altLang="ko-KR" sz="2100" i="1">
-                            <a:latin typeface="Cambria Math" panose="02040503050406030204" pitchFamily="18" charset="0"/>
-                          </a:rPr>
-                          <m:t>−</m:t>
-                        </m:r>
-                      </m:e>
-                    </m:d>
-                  </m:oMath>
-                </a14:m>
-                <a:endParaRPr lang="en-US" altLang="ko-KR" sz="2100" i="1" dirty="0">
-                  <a:latin typeface="Cambria Math" panose="02040503050406030204" pitchFamily="18" charset="0"/>
-                </a:endParaRPr>
-              </a:p>
-              <a:p>
-                <a:pPr marL="742950" lvl="1" indent="-285750">
-                  <a:buFont typeface="Arial" panose="020B0604020202020204" pitchFamily="34" charset="0"/>
-                  <a:buChar char="•"/>
-                </a:pPr>
-                <a:endParaRPr lang="en-US" altLang="ko-KR" sz="2100" i="1" dirty="0">
-                  <a:latin typeface="Cambria Math" panose="02040503050406030204" pitchFamily="18" charset="0"/>
-                </a:endParaRPr>
-              </a:p>
-              <a:p>
-                <a:pPr marL="742950" lvl="1" indent="-285750">
-                  <a:buFont typeface="Arial" panose="020B0604020202020204" pitchFamily="34" charset="0"/>
-                  <a:buChar char="•"/>
-                </a:pPr>
-                <a:endParaRPr lang="en-US" altLang="ko-KR" sz="2100" i="1" dirty="0">
-                  <a:latin typeface="Cambria Math" panose="02040503050406030204" pitchFamily="18" charset="0"/>
-                </a:endParaRPr>
-              </a:p>
-              <a:p>
-                <a:pPr marL="628650" lvl="1" indent="-171450">
-                  <a:buFontTx/>
-                  <a:buChar char="-"/>
-                </a:pPr>
-                <a:r>
-                  <a:rPr lang="en-US" altLang="ko-KR" sz="2100" dirty="0"/>
-                  <a:t>Result</a:t>
-                </a:r>
-              </a:p>
+              <a:lstStyle/>
               <a:p>
                 <a:pPr marL="800100" lvl="1" indent="-342900">
                   <a:buFont typeface="Arial" panose="020B0604020202020204" pitchFamily="34" charset="0"/>
@@ -11321,6 +11624,31 @@
                           <m:sub>
                             <m:r>
                               <a:rPr lang="en-US" altLang="ko-KR" sz="2100" i="1">
+                                <a:latin typeface="Cambria Math" panose="02040503050406030204" pitchFamily="18" charset="0"/>
+                              </a:rPr>
+                              <m:t>𝑚</m:t>
+                            </m:r>
+                          </m:sub>
+                        </m:sSub>
+                        <m:sSub>
+                          <m:sSubPr>
+                            <m:ctrlPr>
+                              <a:rPr lang="en-US" altLang="ko-KR" sz="2100" b="0" i="1" smtClean="0">
+                                <a:latin typeface="Cambria Math" panose="02040503050406030204" pitchFamily="18" charset="0"/>
+                              </a:rPr>
+                            </m:ctrlPr>
+                          </m:sSubPr>
+                          <m:e>
+                            <m:r>
+                              <a:rPr lang="en-US" altLang="ko-KR" sz="2100" b="0" i="1" smtClean="0">
+                                <a:latin typeface="Cambria Math" panose="02040503050406030204" pitchFamily="18" charset="0"/>
+                              </a:rPr>
+                              <m:t>𝑃</m:t>
+                            </m:r>
+                          </m:e>
+                          <m:sub>
+                            <m:r>
+                              <a:rPr lang="en-US" altLang="ko-KR" sz="2100" b="0" i="1" smtClean="0">
                                 <a:latin typeface="Cambria Math" panose="02040503050406030204" pitchFamily="18" charset="0"/>
                               </a:rPr>
                               <m:t>𝑚</m:t>
@@ -11485,6 +11813,31 @@
                             </m:r>
                           </m:sub>
                         </m:sSub>
+                        <m:sSub>
+                          <m:sSubPr>
+                            <m:ctrlPr>
+                              <a:rPr lang="en-US" altLang="ko-KR" sz="2100" b="0" i="1" smtClean="0">
+                                <a:latin typeface="Cambria Math" panose="02040503050406030204" pitchFamily="18" charset="0"/>
+                              </a:rPr>
+                            </m:ctrlPr>
+                          </m:sSubPr>
+                          <m:e>
+                            <m:r>
+                              <a:rPr lang="en-US" altLang="ko-KR" sz="2100" b="0" i="1" smtClean="0">
+                                <a:latin typeface="Cambria Math" panose="02040503050406030204" pitchFamily="18" charset="0"/>
+                              </a:rPr>
+                              <m:t>𝑃</m:t>
+                            </m:r>
+                          </m:e>
+                          <m:sub>
+                            <m:r>
+                              <a:rPr lang="en-US" altLang="ko-KR" sz="2100" b="0" i="1" smtClean="0">
+                                <a:latin typeface="Cambria Math" panose="02040503050406030204" pitchFamily="18" charset="0"/>
+                              </a:rPr>
+                              <m:t>𝑚</m:t>
+                            </m:r>
+                          </m:sub>
+                        </m:sSub>
                       </m:den>
                     </m:f>
                     <m:r>
@@ -11497,43 +11850,16 @@
                 </a14:m>
                 <a:endParaRPr lang="en-US" altLang="ko-KR" sz="2100" dirty="0"/>
               </a:p>
-              <a:p>
-                <a:pPr marL="742950" lvl="1" indent="-285750">
-                  <a:buFont typeface="Arial" panose="020B0604020202020204" pitchFamily="34" charset="0"/>
-                  <a:buChar char="•"/>
-                </a:pPr>
-                <a:endParaRPr lang="en-US" altLang="ko-KR" sz="1600" i="1" dirty="0">
-                  <a:latin typeface="Cambria Math" panose="02040503050406030204" pitchFamily="18" charset="0"/>
-                </a:endParaRPr>
-              </a:p>
-              <a:p>
-                <a:pPr marL="628650" lvl="1" indent="-171450">
-                  <a:buFontTx/>
-                  <a:buChar char="-"/>
-                </a:pPr>
-                <a:endParaRPr lang="en-US" altLang="ko-KR" sz="1600" dirty="0">
-                  <a:latin typeface="+mn-lt"/>
-                </a:endParaRPr>
-              </a:p>
-              <a:p>
-                <a:pPr marL="628650" lvl="1" indent="-171450">
-                  <a:buFontTx/>
-                  <a:buChar char="-"/>
-                </a:pPr>
-                <a:endParaRPr lang="ko-KR" altLang="en-US" sz="1000" b="1" dirty="0">
-                  <a:latin typeface="+mn-lt"/>
-                </a:endParaRPr>
-              </a:p>
             </p:txBody>
           </p:sp>
         </mc:Choice>
         <mc:Fallback xmlns="">
           <p:sp>
             <p:nvSpPr>
-              <p:cNvPr id="10" name="제목 6">
+              <p:cNvPr id="4" name="TextBox 3">
                 <a:extLst>
                   <a:ext uri="{FF2B5EF4-FFF2-40B4-BE49-F238E27FC236}">
-                    <a16:creationId xmlns:a16="http://schemas.microsoft.com/office/drawing/2014/main" id="{5EA88BA0-7F43-CB8A-5542-6206F7900931}"/>
+                    <a16:creationId xmlns:a16="http://schemas.microsoft.com/office/drawing/2014/main" id="{15163CFD-F322-99C6-82E3-AA40B7C7693A}"/>
                   </a:ext>
                 </a:extLst>
               </p:cNvPr>
@@ -11544,8 +11870,8 @@
             </p:nvSpPr>
             <p:spPr>
               <a:xfrm>
-                <a:off x="495300" y="902940"/>
-                <a:ext cx="4362450" cy="3624610"/>
+                <a:off x="2254250" y="3657735"/>
+                <a:ext cx="4387850" cy="1470724"/>
               </a:xfrm>
               <a:prstGeom prst="rect">
                 <a:avLst/>
@@ -11553,7 +11879,7 @@
               <a:blipFill>
                 <a:blip r:embed="rId4"/>
                 <a:stretch>
-                  <a:fillRect l="-698" t="-1681"/>
+                  <a:fillRect/>
                 </a:stretch>
               </a:blipFill>
             </p:spPr>
@@ -11572,222 +11898,10 @@
           </p:sp>
         </mc:Fallback>
       </mc:AlternateContent>
-      <p:sp>
-        <p:nvSpPr>
-          <p:cNvPr id="2" name="슬라이드 번호 개체 틀 1">
-            <a:extLst>
-              <a:ext uri="{FF2B5EF4-FFF2-40B4-BE49-F238E27FC236}">
-                <a16:creationId xmlns:a16="http://schemas.microsoft.com/office/drawing/2014/main" id="{CD3C6554-AAC4-38F2-83F5-D814DF46C687}"/>
-              </a:ext>
-            </a:extLst>
-          </p:cNvPr>
-          <p:cNvSpPr>
-            <a:spLocks noGrp="1"/>
-          </p:cNvSpPr>
-          <p:nvPr>
-            <p:ph type="sldNum" sz="quarter" idx="12"/>
-          </p:nvPr>
-        </p:nvSpPr>
-        <p:spPr/>
-        <p:txBody>
-          <a:bodyPr/>
-          <a:lstStyle/>
-          <a:p>
-            <a:fld id="{57A7753D-33D3-4DE4-B918-257BB52428D1}" type="slidenum">
-              <a:rPr lang="ko-KR" altLang="en-US" smtClean="0"/>
-              <a:t>5</a:t>
-            </a:fld>
-            <a:endParaRPr lang="ko-KR" altLang="en-US"/>
-          </a:p>
-        </p:txBody>
-      </p:sp>
-      <p:sp>
-        <p:nvSpPr>
-          <p:cNvPr id="17" name="제목 6">
-            <a:extLst>
-              <a:ext uri="{FF2B5EF4-FFF2-40B4-BE49-F238E27FC236}">
-                <a16:creationId xmlns:a16="http://schemas.microsoft.com/office/drawing/2014/main" id="{3D79B308-07CF-AF87-5FEE-B7B870835B1F}"/>
-              </a:ext>
-            </a:extLst>
-          </p:cNvPr>
-          <p:cNvSpPr txBox="1">
-            <a:spLocks/>
-          </p:cNvSpPr>
-          <p:nvPr/>
-        </p:nvSpPr>
-        <p:spPr>
-          <a:xfrm>
-            <a:off x="584200" y="2462392"/>
-            <a:ext cx="4362450" cy="1351904"/>
-          </a:xfrm>
-          <a:prstGeom prst="rect">
-            <a:avLst/>
-          </a:prstGeom>
-        </p:spPr>
-        <p:txBody>
-          <a:bodyPr vert="horz" lIns="91440" tIns="45720" rIns="91440" bIns="45720" rtlCol="0" anchor="t" anchorCtr="0">
-            <a:normAutofit fontScale="97500"/>
-          </a:bodyPr>
-          <a:lstStyle>
-            <a:lvl1pPr algn="l" defTabSz="914400" rtl="0" eaLnBrk="1" latinLnBrk="1" hangingPunct="1">
-              <a:lnSpc>
-                <a:spcPct val="90000"/>
-              </a:lnSpc>
-              <a:spcBef>
-                <a:spcPct val="0"/>
-              </a:spcBef>
-              <a:buNone/>
-              <a:defRPr sz="2400" kern="1200">
-                <a:solidFill>
-                  <a:schemeClr val="tx1"/>
-                </a:solidFill>
-                <a:latin typeface="+mj-lt"/>
-                <a:ea typeface="+mj-ea"/>
-                <a:cs typeface="+mj-cs"/>
-              </a:defRPr>
-            </a:lvl1pPr>
-          </a:lstStyle>
-          <a:p>
-            <a:pPr marL="628650" lvl="1" indent="-171450">
-              <a:buFontTx/>
-              <a:buChar char="-"/>
-            </a:pPr>
-            <a:endParaRPr lang="ko-KR" altLang="en-US" sz="1000" b="1" dirty="0">
-              <a:latin typeface="+mn-lt"/>
-            </a:endParaRPr>
-          </a:p>
-        </p:txBody>
-      </p:sp>
-      <p:sp>
-        <p:nvSpPr>
-          <p:cNvPr id="6" name="곱하기 기호 5">
-            <a:extLst>
-              <a:ext uri="{FF2B5EF4-FFF2-40B4-BE49-F238E27FC236}">
-                <a16:creationId xmlns:a16="http://schemas.microsoft.com/office/drawing/2014/main" id="{BB77F5F3-5BC6-3D24-A78E-AA10EEB17695}"/>
-              </a:ext>
-            </a:extLst>
-          </p:cNvPr>
-          <p:cNvSpPr/>
-          <p:nvPr/>
-        </p:nvSpPr>
-        <p:spPr>
-          <a:xfrm>
-            <a:off x="7969251" y="1370769"/>
-            <a:ext cx="152400" cy="133350"/>
-          </a:xfrm>
-          <a:prstGeom prst="mathMultiply">
-            <a:avLst/>
-          </a:prstGeom>
-          <a:ln>
-            <a:solidFill>
-              <a:schemeClr val="accent1"/>
-            </a:solidFill>
-          </a:ln>
-        </p:spPr>
-        <p:style>
-          <a:lnRef idx="2">
-            <a:schemeClr val="accent1">
-              <a:shade val="15000"/>
-            </a:schemeClr>
-          </a:lnRef>
-          <a:fillRef idx="1">
-            <a:schemeClr val="accent1"/>
-          </a:fillRef>
-          <a:effectRef idx="0">
-            <a:schemeClr val="accent1"/>
-          </a:effectRef>
-          <a:fontRef idx="minor">
-            <a:schemeClr val="lt1"/>
-          </a:fontRef>
-        </p:style>
-        <p:txBody>
-          <a:bodyPr rtlCol="0" anchor="ctr"/>
-          <a:lstStyle/>
-          <a:p>
-            <a:pPr algn="ctr"/>
-            <a:endParaRPr lang="ko-KR" altLang="en-US">
-              <a:ln w="0"/>
-              <a:solidFill>
-                <a:schemeClr val="accent1"/>
-              </a:solidFill>
-              <a:effectLst>
-                <a:outerShdw blurRad="38100" dist="25400" dir="5400000" algn="ctr" rotWithShape="0">
-                  <a:srgbClr val="6E747A">
-                    <a:alpha val="43000"/>
-                  </a:srgbClr>
-                </a:outerShdw>
-              </a:effectLst>
-            </a:endParaRPr>
-          </a:p>
-        </p:txBody>
-      </p:sp>
-      <p:sp>
-        <p:nvSpPr>
-          <p:cNvPr id="11" name="곱하기 기호 10">
-            <a:extLst>
-              <a:ext uri="{FF2B5EF4-FFF2-40B4-BE49-F238E27FC236}">
-                <a16:creationId xmlns:a16="http://schemas.microsoft.com/office/drawing/2014/main" id="{C4C3889B-401D-F506-AD40-8CE454001928}"/>
-              </a:ext>
-            </a:extLst>
-          </p:cNvPr>
-          <p:cNvSpPr/>
-          <p:nvPr/>
-        </p:nvSpPr>
-        <p:spPr>
-          <a:xfrm>
-            <a:off x="7983009" y="3362325"/>
-            <a:ext cx="152400" cy="133350"/>
-          </a:xfrm>
-          <a:prstGeom prst="mathMultiply">
-            <a:avLst/>
-          </a:prstGeom>
-          <a:ln>
-            <a:solidFill>
-              <a:schemeClr val="accent1"/>
-            </a:solidFill>
-          </a:ln>
-        </p:spPr>
-        <p:style>
-          <a:lnRef idx="2">
-            <a:schemeClr val="accent1">
-              <a:shade val="15000"/>
-            </a:schemeClr>
-          </a:lnRef>
-          <a:fillRef idx="1">
-            <a:schemeClr val="accent1"/>
-          </a:fillRef>
-          <a:effectRef idx="0">
-            <a:schemeClr val="accent1"/>
-          </a:effectRef>
-          <a:fontRef idx="minor">
-            <a:schemeClr val="lt1"/>
-          </a:fontRef>
-        </p:style>
-        <p:txBody>
-          <a:bodyPr rtlCol="0" anchor="ctr"/>
-          <a:lstStyle/>
-          <a:p>
-            <a:pPr algn="ctr"/>
-            <a:endParaRPr lang="ko-KR" altLang="en-US">
-              <a:ln w="0"/>
-              <a:solidFill>
-                <a:schemeClr val="accent1"/>
-              </a:solidFill>
-              <a:effectLst>
-                <a:outerShdw blurRad="38100" dist="25400" dir="5400000" algn="ctr" rotWithShape="0">
-                  <a:srgbClr val="6E747A">
-                    <a:alpha val="43000"/>
-                  </a:srgbClr>
-                </a:outerShdw>
-              </a:effectLst>
-            </a:endParaRPr>
-          </a:p>
-        </p:txBody>
-      </p:sp>
     </p:spTree>
     <p:extLst>
       <p:ext uri="{BB962C8B-B14F-4D97-AF65-F5344CB8AC3E}">
-        <p14:creationId xmlns:p14="http://schemas.microsoft.com/office/powerpoint/2010/main" val="2348408823"/>
+        <p14:creationId xmlns:p14="http://schemas.microsoft.com/office/powerpoint/2010/main" val="4151816580"/>
       </p:ext>
     </p:extLst>
   </p:cSld>
@@ -11813,7 +11927,7 @@
         <p:cNvPr id="1" name="">
           <a:extLst>
             <a:ext uri="{FF2B5EF4-FFF2-40B4-BE49-F238E27FC236}">
-              <a16:creationId xmlns:a16="http://schemas.microsoft.com/office/drawing/2014/main" id="{6F7D5CCC-712B-89A8-31FC-1FB11C5F2501}"/>
+              <a16:creationId xmlns:a16="http://schemas.microsoft.com/office/drawing/2014/main" id="{D824BD8B-D2EA-8222-3EA3-EC7734C3F656}"/>
             </a:ext>
           </a:extLst>
         </p:cNvPr>
@@ -11833,7 +11947,7 @@
           <p:cNvPr id="7" name="제목 6">
             <a:extLst>
               <a:ext uri="{FF2B5EF4-FFF2-40B4-BE49-F238E27FC236}">
-                <a16:creationId xmlns:a16="http://schemas.microsoft.com/office/drawing/2014/main" id="{A272025F-FBF7-B791-216C-2F0A7D6F5247}"/>
+                <a16:creationId xmlns:a16="http://schemas.microsoft.com/office/drawing/2014/main" id="{4FA42AE9-0828-05D4-5C82-033FDA58042B}"/>
               </a:ext>
             </a:extLst>
           </p:cNvPr>
@@ -11856,7 +11970,7 @@
                 <a:latin typeface="+mn-lt"/>
                 <a:ea typeface="나눔스퀘어 Bold" panose="020B0600000101010101" pitchFamily="50" charset="-127"/>
               </a:rPr>
-              <a:t>4. Design Model</a:t>
+              <a:t>4. Analysis Model</a:t>
             </a:r>
             <a:endParaRPr lang="ko-KR" altLang="en-US" b="1" dirty="0">
               <a:latin typeface="+mj-ea"/>
@@ -11869,7 +11983,7 @@
           <p:cNvPr id="2" name="슬라이드 번호 개체 틀 1">
             <a:extLst>
               <a:ext uri="{FF2B5EF4-FFF2-40B4-BE49-F238E27FC236}">
-                <a16:creationId xmlns:a16="http://schemas.microsoft.com/office/drawing/2014/main" id="{84C19963-35BA-8791-23E3-8C3F19584C50}"/>
+                <a16:creationId xmlns:a16="http://schemas.microsoft.com/office/drawing/2014/main" id="{5057953F-82A8-3EF7-6EE3-13AB2EB6130C}"/>
               </a:ext>
             </a:extLst>
           </p:cNvPr>
@@ -11895,10 +12009,10 @@
       </p:sp>
       <p:pic>
         <p:nvPicPr>
-          <p:cNvPr id="8" name="그림 7">
+          <p:cNvPr id="4" name="그림 3">
             <a:extLst>
               <a:ext uri="{FF2B5EF4-FFF2-40B4-BE49-F238E27FC236}">
-                <a16:creationId xmlns:a16="http://schemas.microsoft.com/office/drawing/2014/main" id="{49E22F66-1324-ABD2-E595-5DA2F575CA8C}"/>
+                <a16:creationId xmlns:a16="http://schemas.microsoft.com/office/drawing/2014/main" id="{87CE6CF4-4C0D-591A-9955-E512BF88ABF4}"/>
               </a:ext>
             </a:extLst>
           </p:cNvPr>
@@ -11915,18 +12029,203 @@
         </p:blipFill>
         <p:spPr>
           <a:xfrm>
-            <a:off x="416560" y="823821"/>
-            <a:ext cx="9144000" cy="5640993"/>
+            <a:off x="0" y="961643"/>
+            <a:ext cx="8930626" cy="3916268"/>
           </a:xfrm>
           <a:prstGeom prst="rect">
             <a:avLst/>
           </a:prstGeom>
         </p:spPr>
       </p:pic>
+      <mc:AlternateContent xmlns:mc="http://schemas.openxmlformats.org/markup-compatibility/2006" xmlns:a14="http://schemas.microsoft.com/office/drawing/2010/main">
+        <mc:Choice Requires="a14">
+          <p:sp>
+            <p:nvSpPr>
+              <p:cNvPr id="5" name="TextBox 4">
+                <a:extLst>
+                  <a:ext uri="{FF2B5EF4-FFF2-40B4-BE49-F238E27FC236}">
+                    <a16:creationId xmlns:a16="http://schemas.microsoft.com/office/drawing/2014/main" id="{55E51EBA-6B18-F801-6EC2-1542320E1AE0}"/>
+                  </a:ext>
+                </a:extLst>
+              </p:cNvPr>
+              <p:cNvSpPr txBox="1"/>
+              <p:nvPr/>
+            </p:nvSpPr>
+            <p:spPr>
+              <a:xfrm>
+                <a:off x="77462" y="4877911"/>
+                <a:ext cx="4545337" cy="1384995"/>
+              </a:xfrm>
+              <a:prstGeom prst="rect">
+                <a:avLst/>
+              </a:prstGeom>
+              <a:noFill/>
+            </p:spPr>
+            <p:txBody>
+              <a:bodyPr wrap="square" rtlCol="0">
+                <a:spAutoFit/>
+              </a:bodyPr>
+              <a:lstStyle/>
+              <a:p>
+                <a:pPr marL="800100" lvl="1" indent="-342900">
+                  <a:buFont typeface="Arial" panose="020B0604020202020204" pitchFamily="34" charset="0"/>
+                  <a:buChar char="•"/>
+                </a:pPr>
+                <a14:m>
+                  <m:oMath xmlns:m="http://schemas.openxmlformats.org/officeDocument/2006/math">
+                    <m:r>
+                      <a:rPr lang="en-US" altLang="ko-KR" sz="2100" i="1" dirty="0" smtClean="0">
+                        <a:latin typeface="Cambria Math" panose="02040503050406030204" pitchFamily="18" charset="0"/>
+                      </a:rPr>
+                      <m:t>𝐷𝑒𝑎𝑑𝑍𝑜𝑛𝑒</m:t>
+                    </m:r>
+                    <m:r>
+                      <a:rPr lang="en-US" altLang="ko-KR" sz="2100" b="0" i="1" dirty="0" smtClean="0">
+                        <a:latin typeface="Cambria Math" panose="02040503050406030204" pitchFamily="18" charset="0"/>
+                      </a:rPr>
+                      <m:t>= </m:t>
+                    </m:r>
+                    <m:r>
+                      <a:rPr lang="en-US" altLang="ko-KR" sz="2100" i="1" dirty="0" smtClean="0">
+                        <a:latin typeface="Cambria Math" panose="02040503050406030204" pitchFamily="18" charset="0"/>
+                      </a:rPr>
+                      <m:t>0.05 </m:t>
+                    </m:r>
+                    <m:r>
+                      <a:rPr lang="en-US" altLang="ko-KR" sz="2100" i="1" dirty="0" smtClean="0">
+                        <a:latin typeface="Cambria Math" panose="02040503050406030204" pitchFamily="18" charset="0"/>
+                      </a:rPr>
+                      <m:t>𝑡𝑜</m:t>
+                    </m:r>
+                    <m:r>
+                      <a:rPr lang="en-US" altLang="ko-KR" sz="2100" i="1" dirty="0" smtClean="0">
+                        <a:latin typeface="Cambria Math" panose="02040503050406030204" pitchFamily="18" charset="0"/>
+                      </a:rPr>
+                      <m:t> −0.05</m:t>
+                    </m:r>
+                  </m:oMath>
+                </a14:m>
+                <a:endParaRPr lang="en-US" altLang="ko-KR" sz="2100" i="1" dirty="0">
+                  <a:latin typeface="Cambria Math" panose="02040503050406030204" pitchFamily="18" charset="0"/>
+                </a:endParaRPr>
+              </a:p>
+              <a:p>
+                <a:pPr marL="800100" lvl="1" indent="-342900">
+                  <a:buFont typeface="Arial" panose="020B0604020202020204" pitchFamily="34" charset="0"/>
+                  <a:buChar char="•"/>
+                </a:pPr>
+                <a:endParaRPr lang="en-US" altLang="ko-KR" sz="2100" i="1" dirty="0">
+                  <a:latin typeface="Cambria Math" panose="02040503050406030204" pitchFamily="18" charset="0"/>
+                </a:endParaRPr>
+              </a:p>
+              <a:p>
+                <a:pPr marL="800100" lvl="1" indent="-342900">
+                  <a:buFont typeface="Arial" panose="020B0604020202020204" pitchFamily="34" charset="0"/>
+                  <a:buChar char="•"/>
+                </a:pPr>
+                <a:endParaRPr lang="en-US" altLang="ko-KR" sz="2100" b="0" i="1" dirty="0">
+                  <a:latin typeface="Cambria Math" panose="02040503050406030204" pitchFamily="18" charset="0"/>
+                </a:endParaRPr>
+              </a:p>
+              <a:p>
+                <a:pPr marL="800100" lvl="1" indent="-342900">
+                  <a:buFont typeface="Arial" panose="020B0604020202020204" pitchFamily="34" charset="0"/>
+                  <a:buChar char="•"/>
+                </a:pPr>
+                <a14:m>
+                  <m:oMath xmlns:m="http://schemas.openxmlformats.org/officeDocument/2006/math">
+                    <m:r>
+                      <a:rPr lang="en-US" altLang="ko-KR" sz="2100" b="0" i="1" smtClean="0">
+                        <a:latin typeface="Cambria Math" panose="02040503050406030204" pitchFamily="18" charset="0"/>
+                      </a:rPr>
+                      <m:t>𝑁𝑜𝑖𝑠𝑒</m:t>
+                    </m:r>
+                    <m:r>
+                      <a:rPr lang="en-US" altLang="ko-KR" sz="2100" b="0" i="1" smtClean="0">
+                        <a:latin typeface="Cambria Math" panose="02040503050406030204" pitchFamily="18" charset="0"/>
+                      </a:rPr>
+                      <m:t> </m:t>
+                    </m:r>
+                    <m:r>
+                      <a:rPr lang="en-US" altLang="ko-KR" sz="2100" b="0" i="1" smtClean="0">
+                        <a:latin typeface="Cambria Math" panose="02040503050406030204" pitchFamily="18" charset="0"/>
+                      </a:rPr>
+                      <m:t>𝑝𝑜𝑤𝑒𝑟</m:t>
+                    </m:r>
+                    <m:r>
+                      <a:rPr lang="en-US" altLang="ko-KR" sz="2100" b="0" i="1" smtClean="0">
+                        <a:latin typeface="Cambria Math" panose="02040503050406030204" pitchFamily="18" charset="0"/>
+                      </a:rPr>
+                      <m:t>=0.02 [</m:t>
+                    </m:r>
+                    <m:r>
+                      <a:rPr lang="en-US" altLang="ko-KR" sz="2100" b="0" i="1" smtClean="0">
+                        <a:latin typeface="Cambria Math" panose="02040503050406030204" pitchFamily="18" charset="0"/>
+                      </a:rPr>
+                      <m:t>𝑊</m:t>
+                    </m:r>
+                    <m:r>
+                      <a:rPr lang="en-US" altLang="ko-KR" sz="2100" b="0" i="1" smtClean="0">
+                        <a:latin typeface="Cambria Math" panose="02040503050406030204" pitchFamily="18" charset="0"/>
+                      </a:rPr>
+                      <m:t>]</m:t>
+                    </m:r>
+                  </m:oMath>
+                </a14:m>
+                <a:endParaRPr lang="en-US" altLang="ko-KR" sz="2100" dirty="0"/>
+              </a:p>
+            </p:txBody>
+          </p:sp>
+        </mc:Choice>
+        <mc:Fallback xmlns="">
+          <p:sp>
+            <p:nvSpPr>
+              <p:cNvPr id="5" name="TextBox 4">
+                <a:extLst>
+                  <a:ext uri="{FF2B5EF4-FFF2-40B4-BE49-F238E27FC236}">
+                    <a16:creationId xmlns:a16="http://schemas.microsoft.com/office/drawing/2014/main" id="{55E51EBA-6B18-F801-6EC2-1542320E1AE0}"/>
+                  </a:ext>
+                </a:extLst>
+              </p:cNvPr>
+              <p:cNvSpPr txBox="1">
+                <a:spLocks noRot="1" noChangeAspect="1" noMove="1" noResize="1" noEditPoints="1" noAdjustHandles="1" noChangeArrowheads="1" noChangeShapeType="1" noTextEdit="1"/>
+              </p:cNvSpPr>
+              <p:nvPr/>
+            </p:nvSpPr>
+            <p:spPr>
+              <a:xfrm>
+                <a:off x="77462" y="4877911"/>
+                <a:ext cx="4545337" cy="1384995"/>
+              </a:xfrm>
+              <a:prstGeom prst="rect">
+                <a:avLst/>
+              </a:prstGeom>
+              <a:blipFill>
+                <a:blip r:embed="rId4"/>
+                <a:stretch>
+                  <a:fillRect t="-881" b="-6167"/>
+                </a:stretch>
+              </a:blipFill>
+            </p:spPr>
+            <p:txBody>
+              <a:bodyPr/>
+              <a:lstStyle/>
+              <a:p>
+                <a:r>
+                  <a:rPr lang="ko-KR" altLang="en-US">
+                    <a:noFill/>
+                  </a:rPr>
+                  <a:t> </a:t>
+                </a:r>
+              </a:p>
+            </p:txBody>
+          </p:sp>
+        </mc:Fallback>
+      </mc:AlternateContent>
     </p:spTree>
     <p:extLst>
       <p:ext uri="{BB962C8B-B14F-4D97-AF65-F5344CB8AC3E}">
-        <p14:creationId xmlns:p14="http://schemas.microsoft.com/office/powerpoint/2010/main" val="4151816580"/>
+        <p14:creationId xmlns:p14="http://schemas.microsoft.com/office/powerpoint/2010/main" val="3332333722"/>
       </p:ext>
     </p:extLst>
   </p:cSld>
@@ -12110,7 +12409,7 @@
             </p:nvSpPr>
             <p:spPr>
               <a:xfrm>
-                <a:off x="495300" y="902940"/>
+                <a:off x="273050" y="1055340"/>
                 <a:ext cx="4362450" cy="3624610"/>
               </a:xfrm>
               <a:prstGeom prst="rect">
@@ -12142,7 +12441,8 @@
               </a:lstStyle>
               <a:p>
                 <a:pPr marL="342900" indent="-342900">
-                  <a:buAutoNum type="alphaUcPeriod"/>
+                  <a:buFont typeface="Arial" panose="020B0604020202020204" pitchFamily="34" charset="0"/>
+                  <a:buChar char="•"/>
                 </a:pPr>
                 <a:r>
                   <a:rPr lang="en-US" altLang="ko-KR" sz="1600" b="1" dirty="0">
@@ -12479,7 +12779,7 @@
             </p:nvSpPr>
             <p:spPr>
               <a:xfrm>
-                <a:off x="495300" y="902940"/>
+                <a:off x="273050" y="1055340"/>
                 <a:ext cx="4362450" cy="3624610"/>
               </a:xfrm>
               <a:prstGeom prst="rect">
@@ -12488,7 +12788,7 @@
               <a:blipFill>
                 <a:blip r:embed="rId5"/>
                 <a:stretch>
-                  <a:fillRect l="-698" t="-1176"/>
+                  <a:fillRect l="-559" t="-1176"/>
                 </a:stretch>
               </a:blipFill>
             </p:spPr>
@@ -12511,6 +12811,1097 @@
     <p:extLst>
       <p:ext uri="{BB962C8B-B14F-4D97-AF65-F5344CB8AC3E}">
         <p14:creationId xmlns:p14="http://schemas.microsoft.com/office/powerpoint/2010/main" val="3595679211"/>
+      </p:ext>
+    </p:extLst>
+  </p:cSld>
+  <p:clrMapOvr>
+    <a:masterClrMapping/>
+  </p:clrMapOvr>
+  <mc:AlternateContent xmlns:mc="http://schemas.openxmlformats.org/markup-compatibility/2006" xmlns:p14="http://schemas.microsoft.com/office/powerpoint/2010/main">
+    <mc:Choice Requires="p14">
+      <p:transition spd="slow" p14:dur="2000" advTm="86783"/>
+    </mc:Choice>
+    <mc:Fallback xmlns="">
+      <p:transition spd="slow" advTm="86783"/>
+    </mc:Fallback>
+  </mc:AlternateContent>
+</p:sld>
+</file>
+
+<file path=ppt/slides/slide8.xml><?xml version="1.0" encoding="utf-8"?>
+<p:sld xmlns:a="http://schemas.openxmlformats.org/drawingml/2006/main" xmlns:r="http://schemas.openxmlformats.org/officeDocument/2006/relationships" xmlns:p="http://schemas.openxmlformats.org/presentationml/2006/main">
+  <p:cSld>
+    <p:spTree>
+      <p:nvGrpSpPr>
+        <p:cNvPr id="1" name="">
+          <a:extLst>
+            <a:ext uri="{FF2B5EF4-FFF2-40B4-BE49-F238E27FC236}">
+              <a16:creationId xmlns:a16="http://schemas.microsoft.com/office/drawing/2014/main" id="{2943A01C-362E-352B-AE6D-A4143448445F}"/>
+            </a:ext>
+          </a:extLst>
+        </p:cNvPr>
+        <p:cNvGrpSpPr/>
+        <p:nvPr/>
+      </p:nvGrpSpPr>
+      <p:grpSpPr>
+        <a:xfrm>
+          <a:off x="0" y="0"/>
+          <a:ext cx="0" cy="0"/>
+          <a:chOff x="0" y="0"/>
+          <a:chExt cx="0" cy="0"/>
+        </a:xfrm>
+      </p:grpSpPr>
+      <p:pic>
+        <p:nvPicPr>
+          <p:cNvPr id="10" name="그림 9">
+            <a:extLst>
+              <a:ext uri="{FF2B5EF4-FFF2-40B4-BE49-F238E27FC236}">
+                <a16:creationId xmlns:a16="http://schemas.microsoft.com/office/drawing/2014/main" id="{83341B65-A3F7-7CE1-221B-C98B7ABC5332}"/>
+              </a:ext>
+            </a:extLst>
+          </p:cNvPr>
+          <p:cNvPicPr>
+            <a:picLocks noChangeAspect="1"/>
+          </p:cNvPicPr>
+          <p:nvPr/>
+        </p:nvPicPr>
+        <p:blipFill>
+          <a:blip r:embed="rId3"/>
+          <a:stretch>
+            <a:fillRect/>
+          </a:stretch>
+        </p:blipFill>
+        <p:spPr>
+          <a:xfrm>
+            <a:off x="426107" y="4250672"/>
+            <a:ext cx="4717393" cy="2528090"/>
+          </a:xfrm>
+          <a:prstGeom prst="rect">
+            <a:avLst/>
+          </a:prstGeom>
+        </p:spPr>
+      </p:pic>
+      <p:pic>
+        <p:nvPicPr>
+          <p:cNvPr id="6" name="그림 5">
+            <a:extLst>
+              <a:ext uri="{FF2B5EF4-FFF2-40B4-BE49-F238E27FC236}">
+                <a16:creationId xmlns:a16="http://schemas.microsoft.com/office/drawing/2014/main" id="{81F43137-7D68-AF2D-930E-935F231EA94A}"/>
+              </a:ext>
+            </a:extLst>
+          </p:cNvPr>
+          <p:cNvPicPr>
+            <a:picLocks noChangeAspect="1"/>
+          </p:cNvPicPr>
+          <p:nvPr/>
+        </p:nvPicPr>
+        <p:blipFill>
+          <a:blip r:embed="rId4"/>
+          <a:stretch>
+            <a:fillRect/>
+          </a:stretch>
+        </p:blipFill>
+        <p:spPr>
+          <a:xfrm>
+            <a:off x="338430" y="1241211"/>
+            <a:ext cx="4805070" cy="2558095"/>
+          </a:xfrm>
+          <a:prstGeom prst="rect">
+            <a:avLst/>
+          </a:prstGeom>
+        </p:spPr>
+      </p:pic>
+      <p:sp>
+        <p:nvSpPr>
+          <p:cNvPr id="7" name="제목 6">
+            <a:extLst>
+              <a:ext uri="{FF2B5EF4-FFF2-40B4-BE49-F238E27FC236}">
+                <a16:creationId xmlns:a16="http://schemas.microsoft.com/office/drawing/2014/main" id="{ECB96DAD-F29A-B832-84DE-AE6BBC338B55}"/>
+              </a:ext>
+            </a:extLst>
+          </p:cNvPr>
+          <p:cNvSpPr>
+            <a:spLocks noGrp="1"/>
+          </p:cNvSpPr>
+          <p:nvPr>
+            <p:ph type="title"/>
+          </p:nvPr>
+        </p:nvSpPr>
+        <p:spPr/>
+        <p:txBody>
+          <a:bodyPr>
+            <a:normAutofit fontScale="90000"/>
+          </a:bodyPr>
+          <a:lstStyle/>
+          <a:p>
+            <a:r>
+              <a:rPr lang="en-US" altLang="ko-KR" b="1" dirty="0">
+                <a:latin typeface="+mn-lt"/>
+                <a:ea typeface="나눔스퀘어 Bold" panose="020B0600000101010101" pitchFamily="50" charset="-127"/>
+              </a:rPr>
+              <a:t>4. Performance Analysis</a:t>
+            </a:r>
+            <a:endParaRPr lang="ko-KR" altLang="en-US" b="1" dirty="0">
+              <a:latin typeface="+mn-lt"/>
+            </a:endParaRPr>
+          </a:p>
+        </p:txBody>
+      </p:sp>
+      <p:sp>
+        <p:nvSpPr>
+          <p:cNvPr id="2" name="슬라이드 번호 개체 틀 1">
+            <a:extLst>
+              <a:ext uri="{FF2B5EF4-FFF2-40B4-BE49-F238E27FC236}">
+                <a16:creationId xmlns:a16="http://schemas.microsoft.com/office/drawing/2014/main" id="{5CF9A7A1-C0CB-8BA9-5EA1-4C24B628587D}"/>
+              </a:ext>
+            </a:extLst>
+          </p:cNvPr>
+          <p:cNvSpPr>
+            <a:spLocks noGrp="1"/>
+          </p:cNvSpPr>
+          <p:nvPr>
+            <p:ph type="sldNum" sz="quarter" idx="12"/>
+          </p:nvPr>
+        </p:nvSpPr>
+        <p:spPr/>
+        <p:txBody>
+          <a:bodyPr/>
+          <a:lstStyle/>
+          <a:p>
+            <a:fld id="{57A7753D-33D3-4DE4-B918-257BB52428D1}" type="slidenum">
+              <a:rPr lang="ko-KR" altLang="en-US" smtClean="0"/>
+              <a:t>8</a:t>
+            </a:fld>
+            <a:endParaRPr lang="ko-KR" altLang="en-US"/>
+          </a:p>
+        </p:txBody>
+      </p:sp>
+      <mc:AlternateContent xmlns:mc="http://schemas.openxmlformats.org/markup-compatibility/2006" xmlns:a14="http://schemas.microsoft.com/office/drawing/2010/main">
+        <mc:Choice Requires="a14">
+          <p:sp>
+            <p:nvSpPr>
+              <p:cNvPr id="16" name="제목 6">
+                <a:extLst>
+                  <a:ext uri="{FF2B5EF4-FFF2-40B4-BE49-F238E27FC236}">
+                    <a16:creationId xmlns:a16="http://schemas.microsoft.com/office/drawing/2014/main" id="{EEC7C5E5-F093-6F3D-009A-4B88FBBA0CE1}"/>
+                  </a:ext>
+                </a:extLst>
+              </p:cNvPr>
+              <p:cNvSpPr txBox="1">
+                <a:spLocks/>
+              </p:cNvSpPr>
+              <p:nvPr/>
+            </p:nvSpPr>
+            <p:spPr>
+              <a:xfrm>
+                <a:off x="255879" y="883890"/>
+                <a:ext cx="4805070" cy="475010"/>
+              </a:xfrm>
+              <a:prstGeom prst="rect">
+                <a:avLst/>
+              </a:prstGeom>
+            </p:spPr>
+            <p:txBody>
+              <a:bodyPr vert="horz" lIns="91440" tIns="45720" rIns="91440" bIns="45720" rtlCol="0" anchor="t" anchorCtr="0">
+                <a:normAutofit fontScale="97500"/>
+              </a:bodyPr>
+              <a:lstStyle>
+                <a:lvl1pPr algn="l" defTabSz="914400" rtl="0" eaLnBrk="1" latinLnBrk="1" hangingPunct="1">
+                  <a:lnSpc>
+                    <a:spcPct val="90000"/>
+                  </a:lnSpc>
+                  <a:spcBef>
+                    <a:spcPct val="0"/>
+                  </a:spcBef>
+                  <a:buNone/>
+                  <a:defRPr sz="2400" kern="1200">
+                    <a:solidFill>
+                      <a:schemeClr val="tx1"/>
+                    </a:solidFill>
+                    <a:latin typeface="+mj-lt"/>
+                    <a:ea typeface="+mj-ea"/>
+                    <a:cs typeface="+mj-cs"/>
+                  </a:defRPr>
+                </a:lvl1pPr>
+              </a:lstStyle>
+              <a:p>
+                <a:pPr marL="342900" indent="-342900">
+                  <a:buFont typeface="Arial" panose="020B0604020202020204" pitchFamily="34" charset="0"/>
+                  <a:buChar char="•"/>
+                </a:pPr>
+                <a14:m>
+                  <m:oMath xmlns:m="http://schemas.openxmlformats.org/officeDocument/2006/math">
+                    <m:sSub>
+                      <m:sSubPr>
+                        <m:ctrlPr>
+                          <a:rPr lang="en-US" altLang="ko-KR" sz="1600" b="1" i="1" smtClean="0">
+                            <a:latin typeface="Cambria Math" panose="02040503050406030204" pitchFamily="18" charset="0"/>
+                          </a:rPr>
+                        </m:ctrlPr>
+                      </m:sSubPr>
+                      <m:e>
+                        <m:sSub>
+                          <m:sSubPr>
+                            <m:ctrlPr>
+                              <a:rPr lang="en-US" altLang="ko-KR" sz="1600" b="1" i="1">
+                                <a:latin typeface="Cambria Math" panose="02040503050406030204" pitchFamily="18" charset="0"/>
+                              </a:rPr>
+                            </m:ctrlPr>
+                          </m:sSubPr>
+                          <m:e>
+                            <m:r>
+                              <a:rPr lang="en-US" altLang="ko-KR" sz="1600" b="1" i="1">
+                                <a:latin typeface="Cambria Math" panose="02040503050406030204" pitchFamily="18" charset="0"/>
+                              </a:rPr>
+                              <m:t>𝝍</m:t>
+                            </m:r>
+                          </m:e>
+                          <m:sub>
+                            <m:r>
+                              <a:rPr lang="en-US" altLang="ko-KR" sz="1600" b="1" i="1">
+                                <a:latin typeface="Cambria Math" panose="02040503050406030204" pitchFamily="18" charset="0"/>
+                              </a:rPr>
+                              <m:t>𝒄𝒎𝒅</m:t>
+                            </m:r>
+                          </m:sub>
+                        </m:sSub>
+                        <m:r>
+                          <a:rPr lang="en-US" altLang="ko-KR" sz="1600" b="1" i="1">
+                            <a:latin typeface="Cambria Math" panose="02040503050406030204" pitchFamily="18" charset="0"/>
+                          </a:rPr>
+                          <m:t>=</m:t>
+                        </m:r>
+                        <m:r>
+                          <a:rPr lang="en-US" altLang="ko-KR" sz="1600" b="1" i="1">
+                            <a:latin typeface="Cambria Math" panose="02040503050406030204" pitchFamily="18" charset="0"/>
+                          </a:rPr>
+                          <m:t>𝟖𝟎</m:t>
+                        </m:r>
+                        <m:r>
+                          <a:rPr lang="en-US" altLang="ko-KR" sz="1600" b="1" i="1">
+                            <a:latin typeface="Cambria Math" panose="02040503050406030204" pitchFamily="18" charset="0"/>
+                          </a:rPr>
+                          <m:t> [</m:t>
+                        </m:r>
+                        <m:r>
+                          <a:rPr lang="en-US" altLang="ko-KR" sz="1600" b="1" i="1">
+                            <a:latin typeface="Cambria Math" panose="02040503050406030204" pitchFamily="18" charset="0"/>
+                          </a:rPr>
+                          <m:t>𝒅𝒆𝒈</m:t>
+                        </m:r>
+                        <m:r>
+                          <a:rPr lang="en-US" altLang="ko-KR" sz="1600" b="1" i="1">
+                            <a:latin typeface="Cambria Math" panose="02040503050406030204" pitchFamily="18" charset="0"/>
+                          </a:rPr>
+                          <m:t>]</m:t>
+                        </m:r>
+                        <m:r>
+                          <m:rPr>
+                            <m:nor/>
+                          </m:rPr>
+                          <a:rPr lang="en-US" altLang="ko-KR" sz="1600" b="1" dirty="0"/>
+                          <m:t> </m:t>
+                        </m:r>
+                        <m:r>
+                          <m:rPr>
+                            <m:nor/>
+                          </m:rPr>
+                          <a:rPr lang="en-US" altLang="ko-KR" sz="1600" b="1" i="0" dirty="0" smtClean="0"/>
+                          <m:t>, </m:t>
+                        </m:r>
+                        <m:r>
+                          <a:rPr lang="en-US" altLang="ko-KR" sz="1600" b="1" i="1" smtClean="0">
+                            <a:latin typeface="Cambria Math" panose="02040503050406030204" pitchFamily="18" charset="0"/>
+                          </a:rPr>
+                          <m:t>𝑾</m:t>
+                        </m:r>
+                      </m:e>
+                      <m:sub>
+                        <m:r>
+                          <a:rPr lang="en-US" altLang="ko-KR" sz="1600" b="1" i="1" smtClean="0">
+                            <a:latin typeface="Cambria Math" panose="02040503050406030204" pitchFamily="18" charset="0"/>
+                          </a:rPr>
+                          <m:t>𝒏</m:t>
+                        </m:r>
+                      </m:sub>
+                    </m:sSub>
+                    <m:r>
+                      <a:rPr lang="en-US" altLang="ko-KR" sz="1600" b="1" i="1" smtClean="0">
+                        <a:latin typeface="Cambria Math" panose="02040503050406030204" pitchFamily="18" charset="0"/>
+                      </a:rPr>
+                      <m:t>=</m:t>
+                    </m:r>
+                    <m:r>
+                      <a:rPr lang="en-US" altLang="ko-KR" sz="1600" b="1" i="1" smtClean="0">
+                        <a:latin typeface="Cambria Math" panose="02040503050406030204" pitchFamily="18" charset="0"/>
+                      </a:rPr>
+                      <m:t>𝟑𝟖</m:t>
+                    </m:r>
+                    <m:f>
+                      <m:fPr>
+                        <m:ctrlPr>
+                          <a:rPr lang="en-US" altLang="ko-KR" sz="1600" b="1" i="1" smtClean="0">
+                            <a:latin typeface="Cambria Math" panose="02040503050406030204" pitchFamily="18" charset="0"/>
+                          </a:rPr>
+                        </m:ctrlPr>
+                      </m:fPr>
+                      <m:num>
+                        <m:r>
+                          <a:rPr lang="en-US" altLang="ko-KR" sz="1600" b="1" i="1" smtClean="0">
+                            <a:latin typeface="Cambria Math" panose="02040503050406030204" pitchFamily="18" charset="0"/>
+                          </a:rPr>
+                          <m:t>𝒓𝒂𝒅</m:t>
+                        </m:r>
+                      </m:num>
+                      <m:den>
+                        <m:r>
+                          <a:rPr lang="en-US" altLang="ko-KR" sz="1600" b="1" i="1" smtClean="0">
+                            <a:latin typeface="Cambria Math" panose="02040503050406030204" pitchFamily="18" charset="0"/>
+                          </a:rPr>
+                          <m:t>𝒔</m:t>
+                        </m:r>
+                      </m:den>
+                    </m:f>
+                    <m:r>
+                      <a:rPr lang="en-US" altLang="ko-KR" sz="1600" b="1" i="1" smtClean="0">
+                        <a:latin typeface="Cambria Math" panose="02040503050406030204" pitchFamily="18" charset="0"/>
+                      </a:rPr>
+                      <m:t>, </m:t>
+                    </m:r>
+                    <m:r>
+                      <a:rPr lang="en-US" altLang="ko-KR" sz="1600" b="1" i="1" smtClean="0">
+                        <a:latin typeface="Cambria Math" panose="02040503050406030204" pitchFamily="18" charset="0"/>
+                      </a:rPr>
+                      <m:t>𝜻</m:t>
+                    </m:r>
+                    <m:r>
+                      <a:rPr lang="en-US" altLang="ko-KR" sz="1600" b="1" i="1" smtClean="0">
+                        <a:latin typeface="Cambria Math" panose="02040503050406030204" pitchFamily="18" charset="0"/>
+                      </a:rPr>
+                      <m:t>=</m:t>
+                    </m:r>
+                    <m:r>
+                      <a:rPr lang="en-US" altLang="ko-KR" sz="1600" b="1" i="1" smtClean="0">
+                        <a:latin typeface="Cambria Math" panose="02040503050406030204" pitchFamily="18" charset="0"/>
+                      </a:rPr>
+                      <m:t>𝟎</m:t>
+                    </m:r>
+                    <m:r>
+                      <a:rPr lang="en-US" altLang="ko-KR" sz="1600" b="1" i="1" smtClean="0">
+                        <a:latin typeface="Cambria Math" panose="02040503050406030204" pitchFamily="18" charset="0"/>
+                      </a:rPr>
+                      <m:t>.</m:t>
+                    </m:r>
+                    <m:r>
+                      <a:rPr lang="en-US" altLang="ko-KR" sz="1600" b="1" i="1" smtClean="0">
+                        <a:latin typeface="Cambria Math" panose="02040503050406030204" pitchFamily="18" charset="0"/>
+                      </a:rPr>
+                      <m:t>𝟕𝟎𝟕</m:t>
+                    </m:r>
+                    <m:r>
+                      <a:rPr lang="en-US" altLang="ko-KR" sz="1600" b="1" i="1" smtClean="0">
+                        <a:latin typeface="Cambria Math" panose="02040503050406030204" pitchFamily="18" charset="0"/>
+                      </a:rPr>
+                      <m:t> </m:t>
+                    </m:r>
+                  </m:oMath>
+                </a14:m>
+                <a:endParaRPr lang="en-US" altLang="ko-KR" sz="1600" b="1" dirty="0">
+                  <a:latin typeface="+mn-lt"/>
+                </a:endParaRPr>
+              </a:p>
+              <a:p>
+                <a:pPr lvl="1"/>
+                <a:endParaRPr lang="en-US" altLang="ko-KR" sz="1600" dirty="0">
+                  <a:latin typeface="+mn-lt"/>
+                </a:endParaRPr>
+              </a:p>
+              <a:p>
+                <a:pPr marL="628650" lvl="1" indent="-171450">
+                  <a:buFontTx/>
+                  <a:buChar char="-"/>
+                </a:pPr>
+                <a:endParaRPr lang="ko-KR" altLang="en-US" sz="1000" b="1" dirty="0">
+                  <a:latin typeface="+mn-lt"/>
+                </a:endParaRPr>
+              </a:p>
+            </p:txBody>
+          </p:sp>
+        </mc:Choice>
+        <mc:Fallback xmlns="">
+          <p:sp>
+            <p:nvSpPr>
+              <p:cNvPr id="16" name="제목 6">
+                <a:extLst>
+                  <a:ext uri="{FF2B5EF4-FFF2-40B4-BE49-F238E27FC236}">
+                    <a16:creationId xmlns:a16="http://schemas.microsoft.com/office/drawing/2014/main" id="{EEC7C5E5-F093-6F3D-009A-4B88FBBA0CE1}"/>
+                  </a:ext>
+                </a:extLst>
+              </p:cNvPr>
+              <p:cNvSpPr txBox="1">
+                <a:spLocks noRot="1" noChangeAspect="1" noMove="1" noResize="1" noEditPoints="1" noAdjustHandles="1" noChangeArrowheads="1" noChangeShapeType="1" noTextEdit="1"/>
+              </p:cNvSpPr>
+              <p:nvPr/>
+            </p:nvSpPr>
+            <p:spPr>
+              <a:xfrm>
+                <a:off x="255879" y="883890"/>
+                <a:ext cx="4805070" cy="475010"/>
+              </a:xfrm>
+              <a:prstGeom prst="rect">
+                <a:avLst/>
+              </a:prstGeom>
+              <a:blipFill>
+                <a:blip r:embed="rId5"/>
+                <a:stretch>
+                  <a:fillRect l="-508"/>
+                </a:stretch>
+              </a:blipFill>
+            </p:spPr>
+            <p:txBody>
+              <a:bodyPr/>
+              <a:lstStyle/>
+              <a:p>
+                <a:r>
+                  <a:rPr lang="ko-KR" altLang="en-US">
+                    <a:noFill/>
+                  </a:rPr>
+                  <a:t> </a:t>
+                </a:r>
+              </a:p>
+            </p:txBody>
+          </p:sp>
+        </mc:Fallback>
+      </mc:AlternateContent>
+      <mc:AlternateContent xmlns:mc="http://schemas.openxmlformats.org/markup-compatibility/2006" xmlns:a14="http://schemas.microsoft.com/office/drawing/2010/main">
+        <mc:Choice Requires="a14">
+          <p:sp>
+            <p:nvSpPr>
+              <p:cNvPr id="11" name="제목 6">
+                <a:extLst>
+                  <a:ext uri="{FF2B5EF4-FFF2-40B4-BE49-F238E27FC236}">
+                    <a16:creationId xmlns:a16="http://schemas.microsoft.com/office/drawing/2014/main" id="{21BDD11F-4D27-CFC3-E911-0DCF5607F63E}"/>
+                  </a:ext>
+                </a:extLst>
+              </p:cNvPr>
+              <p:cNvSpPr txBox="1">
+                <a:spLocks/>
+              </p:cNvSpPr>
+              <p:nvPr/>
+            </p:nvSpPr>
+            <p:spPr>
+              <a:xfrm>
+                <a:off x="255878" y="3831326"/>
+                <a:ext cx="4805071" cy="475010"/>
+              </a:xfrm>
+              <a:prstGeom prst="rect">
+                <a:avLst/>
+              </a:prstGeom>
+            </p:spPr>
+            <p:txBody>
+              <a:bodyPr vert="horz" lIns="91440" tIns="45720" rIns="91440" bIns="45720" rtlCol="0" anchor="t" anchorCtr="0">
+                <a:normAutofit fontScale="97500"/>
+              </a:bodyPr>
+              <a:lstStyle>
+                <a:lvl1pPr algn="l" defTabSz="914400" rtl="0" eaLnBrk="1" latinLnBrk="1" hangingPunct="1">
+                  <a:lnSpc>
+                    <a:spcPct val="90000"/>
+                  </a:lnSpc>
+                  <a:spcBef>
+                    <a:spcPct val="0"/>
+                  </a:spcBef>
+                  <a:buNone/>
+                  <a:defRPr sz="2400" kern="1200">
+                    <a:solidFill>
+                      <a:schemeClr val="tx1"/>
+                    </a:solidFill>
+                    <a:latin typeface="+mj-lt"/>
+                    <a:ea typeface="+mj-ea"/>
+                    <a:cs typeface="+mj-cs"/>
+                  </a:defRPr>
+                </a:lvl1pPr>
+              </a:lstStyle>
+              <a:p>
+                <a:pPr marL="342900" indent="-342900">
+                  <a:buFont typeface="Arial" panose="020B0604020202020204" pitchFamily="34" charset="0"/>
+                  <a:buChar char="•"/>
+                </a:pPr>
+                <a14:m>
+                  <m:oMath xmlns:m="http://schemas.openxmlformats.org/officeDocument/2006/math">
+                    <m:sSub>
+                      <m:sSubPr>
+                        <m:ctrlPr>
+                          <a:rPr lang="en-US" altLang="ko-KR" sz="1600" b="1" i="1" smtClean="0">
+                            <a:latin typeface="Cambria Math" panose="02040503050406030204" pitchFamily="18" charset="0"/>
+                          </a:rPr>
+                        </m:ctrlPr>
+                      </m:sSubPr>
+                      <m:e>
+                        <m:r>
+                          <a:rPr lang="en-US" altLang="ko-KR" sz="1600" b="1" i="1">
+                            <a:latin typeface="Cambria Math" panose="02040503050406030204" pitchFamily="18" charset="0"/>
+                          </a:rPr>
+                          <m:t>𝝍</m:t>
+                        </m:r>
+                      </m:e>
+                      <m:sub>
+                        <m:r>
+                          <a:rPr lang="en-US" altLang="ko-KR" sz="1600" b="1" i="1">
+                            <a:latin typeface="Cambria Math" panose="02040503050406030204" pitchFamily="18" charset="0"/>
+                          </a:rPr>
+                          <m:t>𝒄𝒎𝒅</m:t>
+                        </m:r>
+                      </m:sub>
+                    </m:sSub>
+                    <m:r>
+                      <a:rPr lang="en-US" altLang="ko-KR" sz="1600" b="1" i="1">
+                        <a:latin typeface="Cambria Math" panose="02040503050406030204" pitchFamily="18" charset="0"/>
+                      </a:rPr>
+                      <m:t>=</m:t>
+                    </m:r>
+                    <m:r>
+                      <a:rPr lang="en-US" altLang="ko-KR" sz="1600" b="1" i="1">
+                        <a:latin typeface="Cambria Math" panose="02040503050406030204" pitchFamily="18" charset="0"/>
+                      </a:rPr>
+                      <m:t>𝟑𝟎</m:t>
+                    </m:r>
+                    <m:r>
+                      <a:rPr lang="en-US" altLang="ko-KR" sz="1600" b="1" i="1">
+                        <a:latin typeface="Cambria Math" panose="02040503050406030204" pitchFamily="18" charset="0"/>
+                      </a:rPr>
+                      <m:t> </m:t>
+                    </m:r>
+                    <m:d>
+                      <m:dPr>
+                        <m:begChr m:val="["/>
+                        <m:endChr m:val="]"/>
+                        <m:ctrlPr>
+                          <a:rPr lang="en-US" altLang="ko-KR" sz="1600" b="1" i="1">
+                            <a:latin typeface="Cambria Math" panose="02040503050406030204" pitchFamily="18" charset="0"/>
+                          </a:rPr>
+                        </m:ctrlPr>
+                      </m:dPr>
+                      <m:e>
+                        <m:r>
+                          <a:rPr lang="en-US" altLang="ko-KR" sz="1600" b="1" i="1">
+                            <a:latin typeface="Cambria Math" panose="02040503050406030204" pitchFamily="18" charset="0"/>
+                          </a:rPr>
+                          <m:t>𝒅𝒆𝒈</m:t>
+                        </m:r>
+                      </m:e>
+                    </m:d>
+                    <m:r>
+                      <a:rPr lang="en-US" altLang="ko-KR" sz="1600" b="1" i="1" smtClean="0">
+                        <a:latin typeface="Cambria Math" panose="02040503050406030204" pitchFamily="18" charset="0"/>
+                      </a:rPr>
+                      <m:t>, </m:t>
+                    </m:r>
+                    <m:sSub>
+                      <m:sSubPr>
+                        <m:ctrlPr>
+                          <a:rPr lang="en-US" altLang="ko-KR" sz="1600" b="1" i="1" smtClean="0">
+                            <a:latin typeface="Cambria Math" panose="02040503050406030204" pitchFamily="18" charset="0"/>
+                          </a:rPr>
+                        </m:ctrlPr>
+                      </m:sSubPr>
+                      <m:e>
+                        <m:r>
+                          <a:rPr lang="en-US" altLang="ko-KR" sz="1600" b="1" i="1" smtClean="0">
+                            <a:latin typeface="Cambria Math" panose="02040503050406030204" pitchFamily="18" charset="0"/>
+                          </a:rPr>
+                          <m:t>𝑾</m:t>
+                        </m:r>
+                      </m:e>
+                      <m:sub>
+                        <m:r>
+                          <a:rPr lang="en-US" altLang="ko-KR" sz="1600" b="1" i="1" smtClean="0">
+                            <a:latin typeface="Cambria Math" panose="02040503050406030204" pitchFamily="18" charset="0"/>
+                          </a:rPr>
+                          <m:t>𝒏</m:t>
+                        </m:r>
+                      </m:sub>
+                    </m:sSub>
+                    <m:r>
+                      <a:rPr lang="en-US" altLang="ko-KR" sz="1600" b="1" i="1" smtClean="0">
+                        <a:latin typeface="Cambria Math" panose="02040503050406030204" pitchFamily="18" charset="0"/>
+                      </a:rPr>
+                      <m:t>=</m:t>
+                    </m:r>
+                    <m:r>
+                      <a:rPr lang="en-US" altLang="ko-KR" sz="1600" b="1" i="1" smtClean="0">
+                        <a:latin typeface="Cambria Math" panose="02040503050406030204" pitchFamily="18" charset="0"/>
+                      </a:rPr>
+                      <m:t>𝟑𝟖</m:t>
+                    </m:r>
+                    <m:f>
+                      <m:fPr>
+                        <m:ctrlPr>
+                          <a:rPr lang="en-US" altLang="ko-KR" sz="1600" b="1" i="1" smtClean="0">
+                            <a:latin typeface="Cambria Math" panose="02040503050406030204" pitchFamily="18" charset="0"/>
+                          </a:rPr>
+                        </m:ctrlPr>
+                      </m:fPr>
+                      <m:num>
+                        <m:r>
+                          <a:rPr lang="en-US" altLang="ko-KR" sz="1600" b="1" i="1" smtClean="0">
+                            <a:latin typeface="Cambria Math" panose="02040503050406030204" pitchFamily="18" charset="0"/>
+                          </a:rPr>
+                          <m:t>𝒓𝒂𝒅</m:t>
+                        </m:r>
+                      </m:num>
+                      <m:den>
+                        <m:r>
+                          <a:rPr lang="en-US" altLang="ko-KR" sz="1600" b="1" i="1" smtClean="0">
+                            <a:latin typeface="Cambria Math" panose="02040503050406030204" pitchFamily="18" charset="0"/>
+                          </a:rPr>
+                          <m:t>𝒔</m:t>
+                        </m:r>
+                      </m:den>
+                    </m:f>
+                    <m:r>
+                      <a:rPr lang="en-US" altLang="ko-KR" sz="1600" b="1" i="1" smtClean="0">
+                        <a:latin typeface="Cambria Math" panose="02040503050406030204" pitchFamily="18" charset="0"/>
+                      </a:rPr>
+                      <m:t>, </m:t>
+                    </m:r>
+                    <m:r>
+                      <a:rPr lang="en-US" altLang="ko-KR" sz="1600" b="1" i="1" smtClean="0">
+                        <a:latin typeface="Cambria Math" panose="02040503050406030204" pitchFamily="18" charset="0"/>
+                      </a:rPr>
+                      <m:t>𝜻</m:t>
+                    </m:r>
+                    <m:r>
+                      <a:rPr lang="en-US" altLang="ko-KR" sz="1600" b="1" i="1" smtClean="0">
+                        <a:latin typeface="Cambria Math" panose="02040503050406030204" pitchFamily="18" charset="0"/>
+                      </a:rPr>
+                      <m:t>=</m:t>
+                    </m:r>
+                    <m:r>
+                      <a:rPr lang="en-US" altLang="ko-KR" sz="1600" b="1" i="1" smtClean="0">
+                        <a:latin typeface="Cambria Math" panose="02040503050406030204" pitchFamily="18" charset="0"/>
+                      </a:rPr>
+                      <m:t>𝟎</m:t>
+                    </m:r>
+                    <m:r>
+                      <a:rPr lang="en-US" altLang="ko-KR" sz="1600" b="1" i="1" smtClean="0">
+                        <a:latin typeface="Cambria Math" panose="02040503050406030204" pitchFamily="18" charset="0"/>
+                      </a:rPr>
+                      <m:t>.</m:t>
+                    </m:r>
+                    <m:r>
+                      <a:rPr lang="en-US" altLang="ko-KR" sz="1600" b="1" i="1" smtClean="0">
+                        <a:latin typeface="Cambria Math" panose="02040503050406030204" pitchFamily="18" charset="0"/>
+                      </a:rPr>
+                      <m:t>𝟕𝟎𝟕</m:t>
+                    </m:r>
+                  </m:oMath>
+                </a14:m>
+                <a:endParaRPr lang="en-US" altLang="ko-KR" sz="1600" b="1" dirty="0">
+                  <a:latin typeface="+mn-lt"/>
+                </a:endParaRPr>
+              </a:p>
+              <a:p>
+                <a:pPr lvl="1"/>
+                <a:endParaRPr lang="en-US" altLang="ko-KR" sz="1600" dirty="0">
+                  <a:latin typeface="+mn-lt"/>
+                </a:endParaRPr>
+              </a:p>
+              <a:p>
+                <a:pPr marL="628650" lvl="1" indent="-171450">
+                  <a:buFontTx/>
+                  <a:buChar char="-"/>
+                </a:pPr>
+                <a:endParaRPr lang="ko-KR" altLang="en-US" sz="1000" b="1" dirty="0">
+                  <a:latin typeface="+mn-lt"/>
+                </a:endParaRPr>
+              </a:p>
+            </p:txBody>
+          </p:sp>
+        </mc:Choice>
+        <mc:Fallback xmlns="">
+          <p:sp>
+            <p:nvSpPr>
+              <p:cNvPr id="11" name="제목 6">
+                <a:extLst>
+                  <a:ext uri="{FF2B5EF4-FFF2-40B4-BE49-F238E27FC236}">
+                    <a16:creationId xmlns:a16="http://schemas.microsoft.com/office/drawing/2014/main" id="{21BDD11F-4D27-CFC3-E911-0DCF5607F63E}"/>
+                  </a:ext>
+                </a:extLst>
+              </p:cNvPr>
+              <p:cNvSpPr txBox="1">
+                <a:spLocks noRot="1" noChangeAspect="1" noMove="1" noResize="1" noEditPoints="1" noAdjustHandles="1" noChangeArrowheads="1" noChangeShapeType="1" noTextEdit="1"/>
+              </p:cNvSpPr>
+              <p:nvPr/>
+            </p:nvSpPr>
+            <p:spPr>
+              <a:xfrm>
+                <a:off x="255878" y="3831326"/>
+                <a:ext cx="4805071" cy="475010"/>
+              </a:xfrm>
+              <a:prstGeom prst="rect">
+                <a:avLst/>
+              </a:prstGeom>
+              <a:blipFill>
+                <a:blip r:embed="rId6"/>
+                <a:stretch>
+                  <a:fillRect l="-508"/>
+                </a:stretch>
+              </a:blipFill>
+            </p:spPr>
+            <p:txBody>
+              <a:bodyPr/>
+              <a:lstStyle/>
+              <a:p>
+                <a:r>
+                  <a:rPr lang="ko-KR" altLang="en-US">
+                    <a:noFill/>
+                  </a:rPr>
+                  <a:t> </a:t>
+                </a:r>
+              </a:p>
+            </p:txBody>
+          </p:sp>
+        </mc:Fallback>
+      </mc:AlternateContent>
+      <mc:AlternateContent xmlns:mc="http://schemas.openxmlformats.org/markup-compatibility/2006" xmlns:a14="http://schemas.microsoft.com/office/drawing/2010/main">
+        <mc:Choice Requires="a14">
+          <p:sp>
+            <p:nvSpPr>
+              <p:cNvPr id="17" name="직사각형 16">
+                <a:extLst>
+                  <a:ext uri="{FF2B5EF4-FFF2-40B4-BE49-F238E27FC236}">
+                    <a16:creationId xmlns:a16="http://schemas.microsoft.com/office/drawing/2014/main" id="{A6F63D48-4544-C2DE-5C52-8BC6515EF5DD}"/>
+                  </a:ext>
+                </a:extLst>
+              </p:cNvPr>
+              <p:cNvSpPr/>
+              <p:nvPr/>
+            </p:nvSpPr>
+            <p:spPr>
+              <a:xfrm>
+                <a:off x="3950382" y="1996441"/>
+                <a:ext cx="5128308" cy="1178560"/>
+              </a:xfrm>
+              <a:prstGeom prst="rect">
+                <a:avLst/>
+              </a:prstGeom>
+            </p:spPr>
+            <p:style>
+              <a:lnRef idx="2">
+                <a:schemeClr val="accent1"/>
+              </a:lnRef>
+              <a:fillRef idx="1">
+                <a:schemeClr val="lt1"/>
+              </a:fillRef>
+              <a:effectRef idx="0">
+                <a:schemeClr val="accent1"/>
+              </a:effectRef>
+              <a:fontRef idx="minor">
+                <a:schemeClr val="dk1"/>
+              </a:fontRef>
+            </p:style>
+            <p:txBody>
+              <a:bodyPr rtlCol="0" anchor="ctr"/>
+              <a:lstStyle/>
+              <a:p>
+                <a:pPr algn="ctr"/>
+                <a14:m>
+                  <m:oMath xmlns:m="http://schemas.openxmlformats.org/officeDocument/2006/math">
+                    <m:r>
+                      <a:rPr lang="ko-KR" altLang="en-US" i="1" smtClean="0">
+                        <a:latin typeface="Cambria Math" panose="02040503050406030204" pitchFamily="18" charset="0"/>
+                      </a:rPr>
+                      <m:t>∆</m:t>
+                    </m:r>
+                    <m:r>
+                      <a:rPr lang="en-US" altLang="ko-KR" i="1">
+                        <a:latin typeface="Cambria Math" panose="02040503050406030204" pitchFamily="18" charset="0"/>
+                      </a:rPr>
+                      <m:t>𝑃𝑀</m:t>
+                    </m:r>
+                    <m:r>
+                      <a:rPr lang="en-US" altLang="ko-KR" i="1">
+                        <a:latin typeface="Cambria Math" panose="02040503050406030204" pitchFamily="18" charset="0"/>
+                      </a:rPr>
+                      <m:t>=8.91</m:t>
+                    </m:r>
+                    <m:d>
+                      <m:dPr>
+                        <m:begChr m:val="["/>
+                        <m:endChr m:val="]"/>
+                        <m:ctrlPr>
+                          <a:rPr lang="en-US" altLang="ko-KR" i="1">
+                            <a:latin typeface="Cambria Math" panose="02040503050406030204" pitchFamily="18" charset="0"/>
+                          </a:rPr>
+                        </m:ctrlPr>
+                      </m:dPr>
+                      <m:e>
+                        <m:f>
+                          <m:fPr>
+                            <m:ctrlPr>
+                              <a:rPr lang="en-US" altLang="ko-KR" i="1">
+                                <a:latin typeface="Cambria Math" panose="02040503050406030204" pitchFamily="18" charset="0"/>
+                              </a:rPr>
+                            </m:ctrlPr>
+                          </m:fPr>
+                          <m:num>
+                            <m:r>
+                              <a:rPr lang="en-US" altLang="ko-KR" i="1">
+                                <a:latin typeface="Cambria Math" panose="02040503050406030204" pitchFamily="18" charset="0"/>
+                              </a:rPr>
+                              <m:t>𝑟𝑎𝑑</m:t>
+                            </m:r>
+                          </m:num>
+                          <m:den>
+                            <m:r>
+                              <a:rPr lang="en-US" altLang="ko-KR" i="1">
+                                <a:latin typeface="Cambria Math" panose="02040503050406030204" pitchFamily="18" charset="0"/>
+                              </a:rPr>
+                              <m:t>𝑠</m:t>
+                            </m:r>
+                          </m:den>
+                        </m:f>
+                      </m:e>
+                    </m:d>
+                    <m:r>
+                      <a:rPr lang="en-US" altLang="ko-KR" i="1">
+                        <a:latin typeface="Cambria Math" panose="02040503050406030204" pitchFamily="18" charset="0"/>
+                      </a:rPr>
+                      <m:t>×0.015</m:t>
+                    </m:r>
+                    <m:d>
+                      <m:dPr>
+                        <m:begChr m:val="["/>
+                        <m:endChr m:val="]"/>
+                        <m:ctrlPr>
+                          <a:rPr lang="en-US" altLang="ko-KR" i="1">
+                            <a:latin typeface="Cambria Math" panose="02040503050406030204" pitchFamily="18" charset="0"/>
+                          </a:rPr>
+                        </m:ctrlPr>
+                      </m:dPr>
+                      <m:e>
+                        <m:r>
+                          <a:rPr lang="en-US" altLang="ko-KR" i="1">
+                            <a:latin typeface="Cambria Math" panose="02040503050406030204" pitchFamily="18" charset="0"/>
+                          </a:rPr>
+                          <m:t>𝑠𝑒𝑐</m:t>
+                        </m:r>
+                      </m:e>
+                    </m:d>
+                    <m:r>
+                      <a:rPr lang="en-US" altLang="ko-KR" i="1">
+                        <a:latin typeface="Cambria Math" panose="02040503050406030204" pitchFamily="18" charset="0"/>
+                      </a:rPr>
+                      <m:t>×</m:t>
+                    </m:r>
+                    <m:f>
+                      <m:fPr>
+                        <m:ctrlPr>
+                          <a:rPr lang="en-US" altLang="ko-KR" i="1">
+                            <a:latin typeface="Cambria Math" panose="02040503050406030204" pitchFamily="18" charset="0"/>
+                          </a:rPr>
+                        </m:ctrlPr>
+                      </m:fPr>
+                      <m:num>
+                        <m:r>
+                          <a:rPr lang="en-US" altLang="ko-KR" i="1">
+                            <a:latin typeface="Cambria Math" panose="02040503050406030204" pitchFamily="18" charset="0"/>
+                          </a:rPr>
+                          <m:t>180</m:t>
+                        </m:r>
+                      </m:num>
+                      <m:den>
+                        <m:r>
+                          <a:rPr lang="en-US" altLang="ko-KR" i="1">
+                            <a:latin typeface="Cambria Math" panose="02040503050406030204" pitchFamily="18" charset="0"/>
+                          </a:rPr>
+                          <m:t>𝜋</m:t>
+                        </m:r>
+                      </m:den>
+                    </m:f>
+                  </m:oMath>
+                </a14:m>
+                <a:r>
+                  <a:rPr lang="ko-KR" altLang="en-US" dirty="0"/>
+                  <a:t> </a:t>
+                </a:r>
+                <a14:m>
+                  <m:oMath xmlns:m="http://schemas.openxmlformats.org/officeDocument/2006/math">
+                    <m:r>
+                      <a:rPr lang="ko-KR" altLang="en-US" i="1" dirty="0">
+                        <a:latin typeface="Cambria Math" panose="02040503050406030204" pitchFamily="18" charset="0"/>
+                      </a:rPr>
+                      <m:t>≈</m:t>
+                    </m:r>
+                    <m:r>
+                      <a:rPr lang="en-US" altLang="ko-KR" i="1" dirty="0">
+                        <a:latin typeface="Cambria Math" panose="02040503050406030204" pitchFamily="18" charset="0"/>
+                      </a:rPr>
+                      <m:t>8.6</m:t>
+                    </m:r>
+                    <m:d>
+                      <m:dPr>
+                        <m:begChr m:val="["/>
+                        <m:endChr m:val="]"/>
+                        <m:ctrlPr>
+                          <a:rPr lang="en-US" altLang="ko-KR" i="1" dirty="0">
+                            <a:latin typeface="Cambria Math" panose="02040503050406030204" pitchFamily="18" charset="0"/>
+                          </a:rPr>
+                        </m:ctrlPr>
+                      </m:dPr>
+                      <m:e>
+                        <m:r>
+                          <a:rPr lang="en-US" altLang="ko-KR" i="1" dirty="0">
+                            <a:latin typeface="Cambria Math" panose="02040503050406030204" pitchFamily="18" charset="0"/>
+                          </a:rPr>
+                          <m:t>𝑑𝑒𝑔</m:t>
+                        </m:r>
+                      </m:e>
+                    </m:d>
+                  </m:oMath>
+                </a14:m>
+                <a:endParaRPr lang="en-US" altLang="ko-KR" dirty="0"/>
+              </a:p>
+              <a:p>
+                <a:pPr algn="ctr"/>
+                <a:endParaRPr lang="en-US" altLang="ko-KR" dirty="0"/>
+              </a:p>
+              <a:p>
+                <a:pPr algn="ctr"/>
+                <a:r>
+                  <a:rPr lang="ko-KR" altLang="ko-KR" sz="1400" dirty="0"/>
+                  <a:t>The </a:t>
+                </a:r>
+                <a:r>
+                  <a:rPr lang="ko-KR" altLang="ko-KR" sz="1400" dirty="0" err="1"/>
+                  <a:t>phase</a:t>
+                </a:r>
+                <a:r>
+                  <a:rPr lang="ko-KR" altLang="ko-KR" sz="1400" dirty="0"/>
+                  <a:t> </a:t>
+                </a:r>
+                <a:r>
+                  <a:rPr lang="ko-KR" altLang="ko-KR" sz="1400" dirty="0" err="1"/>
+                  <a:t>margin</a:t>
+                </a:r>
+                <a:r>
+                  <a:rPr lang="ko-KR" altLang="ko-KR" sz="1400" dirty="0"/>
+                  <a:t> </a:t>
+                </a:r>
+                <a:r>
+                  <a:rPr lang="ko-KR" altLang="ko-KR" sz="1400" dirty="0" err="1"/>
+                  <a:t>decreased</a:t>
+                </a:r>
+                <a:r>
+                  <a:rPr lang="ko-KR" altLang="ko-KR" sz="1400" dirty="0"/>
+                  <a:t> </a:t>
+                </a:r>
+                <a:r>
+                  <a:rPr lang="ko-KR" altLang="ko-KR" sz="1400" dirty="0" err="1"/>
+                  <a:t>by</a:t>
+                </a:r>
+                <a:r>
+                  <a:rPr lang="ko-KR" altLang="ko-KR" sz="1400" dirty="0"/>
+                  <a:t> 8.6 </a:t>
+                </a:r>
+                <a:r>
+                  <a:rPr lang="ko-KR" altLang="ko-KR" sz="1400" dirty="0" err="1"/>
+                  <a:t>degrees</a:t>
+                </a:r>
+                <a:r>
+                  <a:rPr lang="ko-KR" altLang="ko-KR" sz="1400" dirty="0"/>
+                  <a:t> </a:t>
+                </a:r>
+                <a:r>
+                  <a:rPr lang="ko-KR" altLang="ko-KR" sz="1400" dirty="0" err="1"/>
+                  <a:t>in</a:t>
+                </a:r>
+                <a:r>
+                  <a:rPr lang="ko-KR" altLang="ko-KR" sz="1400" dirty="0"/>
+                  <a:t> </a:t>
+                </a:r>
+                <a:r>
+                  <a:rPr lang="ko-KR" altLang="ko-KR" sz="1400" dirty="0" err="1"/>
+                  <a:t>the</a:t>
+                </a:r>
+                <a:r>
+                  <a:rPr lang="ko-KR" altLang="ko-KR" sz="1400" dirty="0"/>
+                  <a:t> </a:t>
+                </a:r>
+                <a:r>
+                  <a:rPr lang="ko-KR" altLang="ko-KR" sz="1400" dirty="0" err="1"/>
+                  <a:t>actual</a:t>
+                </a:r>
+                <a:r>
+                  <a:rPr lang="ko-KR" altLang="ko-KR" sz="1400" dirty="0"/>
+                  <a:t> </a:t>
+                </a:r>
+                <a:r>
+                  <a:rPr lang="ko-KR" altLang="ko-KR" sz="1400" dirty="0" err="1"/>
+                  <a:t>system</a:t>
+                </a:r>
+                <a:r>
+                  <a:rPr lang="ko-KR" altLang="ko-KR" sz="1400" dirty="0"/>
+                  <a:t>.</a:t>
+                </a:r>
+                <a:endParaRPr lang="en-US" altLang="ko-KR" sz="1400" dirty="0"/>
+              </a:p>
+              <a:p>
+                <a:pPr algn="ctr"/>
+                <a:endParaRPr lang="en-US" altLang="ko-KR" dirty="0"/>
+              </a:p>
+            </p:txBody>
+          </p:sp>
+        </mc:Choice>
+        <mc:Fallback xmlns="">
+          <p:sp>
+            <p:nvSpPr>
+              <p:cNvPr id="17" name="직사각형 16">
+                <a:extLst>
+                  <a:ext uri="{FF2B5EF4-FFF2-40B4-BE49-F238E27FC236}">
+                    <a16:creationId xmlns:a16="http://schemas.microsoft.com/office/drawing/2014/main" id="{A6F63D48-4544-C2DE-5C52-8BC6515EF5DD}"/>
+                  </a:ext>
+                </a:extLst>
+              </p:cNvPr>
+              <p:cNvSpPr>
+                <a:spLocks noRot="1" noChangeAspect="1" noMove="1" noResize="1" noEditPoints="1" noAdjustHandles="1" noChangeArrowheads="1" noChangeShapeType="1" noTextEdit="1"/>
+              </p:cNvSpPr>
+              <p:nvPr/>
+            </p:nvSpPr>
+            <p:spPr>
+              <a:xfrm>
+                <a:off x="3950382" y="1996441"/>
+                <a:ext cx="5128308" cy="1178560"/>
+              </a:xfrm>
+              <a:prstGeom prst="rect">
+                <a:avLst/>
+              </a:prstGeom>
+              <a:blipFill>
+                <a:blip r:embed="rId7"/>
+                <a:stretch>
+                  <a:fillRect/>
+                </a:stretch>
+              </a:blipFill>
+            </p:spPr>
+            <p:txBody>
+              <a:bodyPr/>
+              <a:lstStyle/>
+              <a:p>
+                <a:r>
+                  <a:rPr lang="ko-KR" altLang="en-US">
+                    <a:noFill/>
+                  </a:rPr>
+                  <a:t> </a:t>
+                </a:r>
+              </a:p>
+            </p:txBody>
+          </p:sp>
+        </mc:Fallback>
+      </mc:AlternateContent>
+    </p:spTree>
+    <p:extLst>
+      <p:ext uri="{BB962C8B-B14F-4D97-AF65-F5344CB8AC3E}">
+        <p14:creationId xmlns:p14="http://schemas.microsoft.com/office/powerpoint/2010/main" val="3046578493"/>
       </p:ext>
     </p:extLst>
   </p:cSld>
